--- a/산출물/슬라이드/cstec-교육체계골격.pptx
+++ b/산출물/슬라이드/cstec-교육체계골격.pptx
@@ -5,11 +5,14 @@
     <p:sldMasterId id="2147483648" r:id="rId1"/>
   </p:sldMasterIdLst>
   <p:notesMasterIdLst>
-    <p:notesMasterId r:id="rId4"/>
+    <p:notesMasterId r:id="rId7"/>
   </p:notesMasterIdLst>
   <p:sldIdLst>
     <p:sldId id="256" r:id="rId2"/>
     <p:sldId id="257" r:id="rId3"/>
+    <p:sldId id="258" r:id="rId4"/>
+    <p:sldId id="259" r:id="rId5"/>
+    <p:sldId id="260" r:id="rId6"/>
   </p:sldIdLst>
   <p:sldSz cx="12192000" cy="6858000"/>
   <p:notesSz cx="6858000" cy="9144000"/>
@@ -152,7 +155,7 @@
     </p:spTree>
     <p:extLst>
       <p:ext uri="{BB962C8B-B14F-4D97-AF65-F5344CB8AC3E}">
-        <p14:creationId xmlns:p14="http://schemas.microsoft.com/office/powerpoint/2010/main" val="535546639"/>
+        <p14:creationId xmlns:p14="http://schemas.microsoft.com/office/powerpoint/2010/main" val="2053718313"/>
       </p:ext>
     </p:extLst>
   </p:cSld>
@@ -323,6 +326,216 @@
 </file>
 
 <file path=ppt/notesSlides/notesSlide2.xml><?xml version="1.0" encoding="utf-8"?>
+<p:notes xmlns:a="http://schemas.openxmlformats.org/drawingml/2006/main" xmlns:r="http://schemas.openxmlformats.org/officeDocument/2006/relationships" xmlns:p="http://schemas.openxmlformats.org/presentationml/2006/main">
+  <p:cSld>
+    <p:spTree>
+      <p:nvGrpSpPr>
+        <p:cNvPr id="1" name=""/>
+        <p:cNvGrpSpPr/>
+        <p:nvPr/>
+      </p:nvGrpSpPr>
+      <p:grpSpPr>
+        <a:xfrm>
+          <a:off x="0" y="0"/>
+          <a:ext cx="0" cy="0"/>
+          <a:chOff x="0" y="0"/>
+          <a:chExt cx="0" cy="0"/>
+        </a:xfrm>
+      </p:grpSpPr>
+      <p:sp>
+        <p:nvSpPr>
+          <p:cNvPr id="2" name="Slide Image Placeholder 1"/>
+          <p:cNvSpPr>
+            <a:spLocks noGrp="1" noRot="1" noChangeAspect="1"/>
+          </p:cNvSpPr>
+          <p:nvPr>
+            <p:ph type="sldImg" idx="2"/>
+          </p:nvPr>
+        </p:nvSpPr>
+        <p:spPr/>
+      </p:sp>
+      <p:sp>
+        <p:nvSpPr>
+          <p:cNvPr id="3" name="Notes Placeholder 2"/>
+          <p:cNvSpPr>
+            <a:spLocks noGrp="1"/>
+          </p:cNvSpPr>
+          <p:nvPr>
+            <p:ph type="body" sz="quarter" idx="3"/>
+          </p:nvPr>
+        </p:nvSpPr>
+        <p:spPr/>
+        <p:txBody>
+          <a:bodyPr/>
+          <a:lstStyle/>
+          <a:p>
+            <a:r>
+              <a:t>AI보안 교육 과정 로드맵입니다. 레벨이 올라갈수록 난이도가 높아지는 3단 구조로, 초급(파랑)은 AI 보안 기초와 안전한 활용, 중급(청록)은 로컬 LLM 인프라 구축과 지능형 보안, 고급(녹색)은 LLM 심층 방어와 침해대응·복구를 다룹니다. 총 7개 과정으로 구성됩니다.</a:t>
+            </a:r>
+          </a:p>
+        </p:txBody>
+      </p:sp>
+      <p:sp>
+        <p:nvSpPr>
+          <p:cNvPr id="4" name="Slide Number Placeholder 3"/>
+          <p:cNvSpPr>
+            <a:spLocks noGrp="1"/>
+          </p:cNvSpPr>
+          <p:nvPr>
+            <p:ph type="sldNum" sz="quarter" idx="5"/>
+          </p:nvPr>
+        </p:nvSpPr>
+        <p:spPr/>
+      </p:sp>
+    </p:spTree>
+  </p:cSld>
+  <p:clrMapOvr>
+    <a:masterClrMapping/>
+  </p:clrMapOvr>
+</p:notes>
+</file>
+
+<file path=ppt/notesSlides/notesSlide3.xml><?xml version="1.0" encoding="utf-8"?>
+<p:notes xmlns:a="http://schemas.openxmlformats.org/drawingml/2006/main" xmlns:r="http://schemas.openxmlformats.org/officeDocument/2006/relationships" xmlns:p="http://schemas.openxmlformats.org/presentationml/2006/main">
+  <p:cSld>
+    <p:spTree>
+      <p:nvGrpSpPr>
+        <p:cNvPr id="1" name=""/>
+        <p:cNvGrpSpPr/>
+        <p:nvPr/>
+      </p:nvGrpSpPr>
+      <p:grpSpPr>
+        <a:xfrm>
+          <a:off x="0" y="0"/>
+          <a:ext cx="0" cy="0"/>
+          <a:chOff x="0" y="0"/>
+          <a:chExt cx="0" cy="0"/>
+        </a:xfrm>
+      </p:grpSpPr>
+      <p:sp>
+        <p:nvSpPr>
+          <p:cNvPr id="2" name="Slide Image Placeholder 1"/>
+          <p:cNvSpPr>
+            <a:spLocks noGrp="1" noRot="1" noChangeAspect="1"/>
+          </p:cNvSpPr>
+          <p:nvPr>
+            <p:ph type="sldImg" idx="2"/>
+          </p:nvPr>
+        </p:nvSpPr>
+        <p:spPr/>
+      </p:sp>
+      <p:sp>
+        <p:nvSpPr>
+          <p:cNvPr id="3" name="Notes Placeholder 2"/>
+          <p:cNvSpPr>
+            <a:spLocks noGrp="1"/>
+          </p:cNvSpPr>
+          <p:nvPr>
+            <p:ph type="body" sz="quarter" idx="3"/>
+          </p:nvPr>
+        </p:nvSpPr>
+        <p:spPr/>
+        <p:txBody>
+          <a:bodyPr/>
+          <a:lstStyle/>
+          <a:p>
+            <a:r>
+              <a:t>로드맵 변형(가로 밴드형)입니다. 왼쪽 레벨 라벨에서 오른쪽 과정 카드로 이어지는 단계별 학습 경로를 강조합니다. 내용은 세로 컬럼형(앞 슬라이드)과 동일하며, 발표 맥락에 맞는 레이아웃을 선택해 사용하면 됩니다.</a:t>
+            </a:r>
+          </a:p>
+        </p:txBody>
+      </p:sp>
+      <p:sp>
+        <p:nvSpPr>
+          <p:cNvPr id="4" name="Slide Number Placeholder 3"/>
+          <p:cNvSpPr>
+            <a:spLocks noGrp="1"/>
+          </p:cNvSpPr>
+          <p:nvPr>
+            <p:ph type="sldNum" sz="quarter" idx="5"/>
+          </p:nvPr>
+        </p:nvSpPr>
+        <p:spPr/>
+      </p:sp>
+    </p:spTree>
+  </p:cSld>
+  <p:clrMapOvr>
+    <a:masterClrMapping/>
+  </p:clrMapOvr>
+</p:notes>
+</file>
+
+<file path=ppt/notesSlides/notesSlide4.xml><?xml version="1.0" encoding="utf-8"?>
+<p:notes xmlns:a="http://schemas.openxmlformats.org/drawingml/2006/main" xmlns:r="http://schemas.openxmlformats.org/officeDocument/2006/relationships" xmlns:p="http://schemas.openxmlformats.org/presentationml/2006/main">
+  <p:cSld>
+    <p:spTree>
+      <p:nvGrpSpPr>
+        <p:cNvPr id="1" name=""/>
+        <p:cNvGrpSpPr/>
+        <p:nvPr/>
+      </p:nvGrpSpPr>
+      <p:grpSpPr>
+        <a:xfrm>
+          <a:off x="0" y="0"/>
+          <a:ext cx="0" cy="0"/>
+          <a:chOff x="0" y="0"/>
+          <a:chExt cx="0" cy="0"/>
+        </a:xfrm>
+      </p:grpSpPr>
+      <p:sp>
+        <p:nvSpPr>
+          <p:cNvPr id="2" name="Slide Image Placeholder 1"/>
+          <p:cNvSpPr>
+            <a:spLocks noGrp="1" noRot="1" noChangeAspect="1"/>
+          </p:cNvSpPr>
+          <p:nvPr>
+            <p:ph type="sldImg" idx="2"/>
+          </p:nvPr>
+        </p:nvSpPr>
+        <p:spPr/>
+      </p:sp>
+      <p:sp>
+        <p:nvSpPr>
+          <p:cNvPr id="3" name="Notes Placeholder 2"/>
+          <p:cNvSpPr>
+            <a:spLocks noGrp="1"/>
+          </p:cNvSpPr>
+          <p:nvPr>
+            <p:ph type="body" sz="quarter" idx="3"/>
+          </p:nvPr>
+        </p:nvSpPr>
+        <p:spPr/>
+        <p:txBody>
+          <a:bodyPr/>
+          <a:lstStyle/>
+          <a:p>
+            <a:r>
+              <a:t>2027 AI 사이버보안 교육체계는 수준별 3단계 7과정 학습 경로로 구성됩니다. 초급은 전 직원이 AI를 위험 없이 쓰는 안전판(안전한 활용), 중급은 AI를 방어 도구로 쓰는 AI for Security, 고급은 AI 시스템 자체를 지키는 Security for AI 단계입니다. 초급→중급→고급으로 갈수록 난이도와 전문성이 높아지며, 전체 과정의 25%를 AI 보안 과정으로 구성해 'AI를 활용하는 사이버보안 전문 인력양성' 체계로 전환하는 것이 목표입니다.</a:t>
+            </a:r>
+          </a:p>
+        </p:txBody>
+      </p:sp>
+      <p:sp>
+        <p:nvSpPr>
+          <p:cNvPr id="4" name="Slide Number Placeholder 3"/>
+          <p:cNvSpPr>
+            <a:spLocks noGrp="1"/>
+          </p:cNvSpPr>
+          <p:nvPr>
+            <p:ph type="sldNum" sz="quarter" idx="5"/>
+          </p:nvPr>
+        </p:nvSpPr>
+        <p:spPr/>
+      </p:sp>
+    </p:spTree>
+  </p:cSld>
+  <p:clrMapOvr>
+    <a:masterClrMapping/>
+  </p:clrMapOvr>
+</p:notes>
+</file>
+
+<file path=ppt/notesSlides/notesSlide5.xml><?xml version="1.0" encoding="utf-8"?>
 <p:notes xmlns:a="http://schemas.openxmlformats.org/drawingml/2006/main" xmlns:r="http://schemas.openxmlformats.org/officeDocument/2006/relationships" xmlns:p="http://schemas.openxmlformats.org/presentationml/2006/main">
   <p:cSld>
     <p:spTree>
@@ -3778,11 +3991,11 @@
         <p:spPr>
           <a:xfrm>
             <a:off x="640080" y="3291840"/>
-            <a:ext cx="5181447" cy="2267712"/>
+            <a:ext cx="5181447" cy="2395727"/>
           </a:xfrm>
           <a:prstGeom prst="roundRect">
             <a:avLst>
-              <a:gd name="adj" fmla="val 4032"/>
+              <a:gd name="adj" fmla="val 3816"/>
             </a:avLst>
           </a:prstGeom>
           <a:solidFill>
@@ -3825,7 +4038,7 @@
         <p:spPr>
           <a:xfrm>
             <a:off x="914400" y="3429000"/>
-            <a:ext cx="4632807" cy="1993392"/>
+            <a:ext cx="4632807" cy="2121408"/>
           </a:xfrm>
           <a:prstGeom prst="rect">
             <a:avLst/>
@@ -3840,11 +4053,11 @@
           <a:p>
             <a:pPr algn="l">
               <a:lnSpc>
-                <a:spcPct val="150000"/>
+                <a:spcPct val="145000"/>
               </a:lnSpc>
             </a:pPr>
             <a:r>
-              <a:rPr sz="1300" b="0">
+              <a:rPr sz="1200" b="0">
                 <a:solidFill>
                   <a:srgbClr val="1E293B"/>
                 </a:solidFill>
@@ -3948,11 +4161,11 @@
         <p:spPr>
           <a:xfrm>
             <a:off x="6370167" y="3291840"/>
-            <a:ext cx="5181447" cy="2267712"/>
+            <a:ext cx="5181447" cy="2395727"/>
           </a:xfrm>
           <a:prstGeom prst="roundRect">
             <a:avLst>
-              <a:gd name="adj" fmla="val 4032"/>
+              <a:gd name="adj" fmla="val 3816"/>
             </a:avLst>
           </a:prstGeom>
           <a:solidFill>
@@ -3995,7 +4208,7 @@
         <p:spPr>
           <a:xfrm>
             <a:off x="6644487" y="3429000"/>
-            <a:ext cx="4632807" cy="1993392"/>
+            <a:ext cx="4632807" cy="2121408"/>
           </a:xfrm>
           <a:prstGeom prst="rect">
             <a:avLst/>
@@ -4010,11 +4223,11 @@
           <a:p>
             <a:pPr algn="l">
               <a:lnSpc>
-                <a:spcPct val="150000"/>
+                <a:spcPct val="145000"/>
               </a:lnSpc>
             </a:pPr>
             <a:r>
-              <a:rPr sz="1300" b="0">
+              <a:rPr sz="1200" b="0">
                 <a:solidFill>
                   <a:srgbClr val="1E293B"/>
                 </a:solidFill>
@@ -4196,6 +4409,5256 @@
 </file>
 
 <file path=ppt/slides/slide2.xml><?xml version="1.0" encoding="utf-8"?>
+<p:sld xmlns:a="http://schemas.openxmlformats.org/drawingml/2006/main" xmlns:r="http://schemas.openxmlformats.org/officeDocument/2006/relationships" xmlns:p="http://schemas.openxmlformats.org/presentationml/2006/main">
+  <p:cSld>
+    <p:bg>
+      <p:bgPr>
+        <a:solidFill>
+          <a:srgbClr val="F8FAFC"/>
+        </a:solidFill>
+        <a:effectLst/>
+      </p:bgPr>
+    </p:bg>
+    <p:spTree>
+      <p:nvGrpSpPr>
+        <p:cNvPr id="1" name=""/>
+        <p:cNvGrpSpPr/>
+        <p:nvPr/>
+      </p:nvGrpSpPr>
+      <p:grpSpPr>
+        <a:xfrm>
+          <a:off x="0" y="0"/>
+          <a:ext cx="0" cy="0"/>
+          <a:chOff x="0" y="0"/>
+          <a:chExt cx="0" cy="0"/>
+        </a:xfrm>
+      </p:grpSpPr>
+      <p:sp>
+        <p:nvSpPr>
+          <p:cNvPr id="2" name="TextBox 1"/>
+          <p:cNvSpPr txBox="1"/>
+          <p:nvPr/>
+        </p:nvSpPr>
+        <p:spPr>
+          <a:xfrm>
+            <a:off x="658368" y="512064"/>
+            <a:ext cx="10893247" cy="731520"/>
+          </a:xfrm>
+          <a:prstGeom prst="rect">
+            <a:avLst/>
+          </a:prstGeom>
+          <a:noFill/>
+        </p:spPr>
+        <p:txBody>
+          <a:bodyPr wrap="square" lIns="45720" tIns="18288" rIns="45720" bIns="18288" anchor="t">
+            <a:spAutoFit/>
+          </a:bodyPr>
+          <a:lstStyle/>
+          <a:p>
+            <a:pPr algn="l"/>
+            <a:r>
+              <a:rPr sz="2700" b="1">
+                <a:solidFill>
+                  <a:srgbClr val="1B2330"/>
+                </a:solidFill>
+                <a:latin typeface="Noto Sans KR"/>
+              </a:rPr>
+              <a:t>AI보안 교육 과정 로드맵 (레벨별)</a:t>
+            </a:r>
+          </a:p>
+        </p:txBody>
+      </p:sp>
+      <p:sp>
+        <p:nvSpPr>
+          <p:cNvPr id="3" name="TextBox 2"/>
+          <p:cNvSpPr txBox="1"/>
+          <p:nvPr/>
+        </p:nvSpPr>
+        <p:spPr>
+          <a:xfrm>
+            <a:off x="676656" y="1188720"/>
+            <a:ext cx="10820095" cy="365760"/>
+          </a:xfrm>
+          <a:prstGeom prst="rect">
+            <a:avLst/>
+          </a:prstGeom>
+          <a:noFill/>
+        </p:spPr>
+        <p:txBody>
+          <a:bodyPr wrap="square" lIns="45720" tIns="18288" rIns="45720" bIns="18288" anchor="t">
+            <a:spAutoFit/>
+          </a:bodyPr>
+          <a:lstStyle/>
+          <a:p>
+            <a:pPr algn="l"/>
+            <a:r>
+              <a:rPr sz="1300" b="0">
+                <a:solidFill>
+                  <a:srgbClr val="5B6470"/>
+                </a:solidFill>
+                <a:latin typeface="Noto Sans KR"/>
+              </a:rPr>
+              <a:t>초급 → 중급 → 고급 · 3개 레벨 7개 과정</a:t>
+            </a:r>
+          </a:p>
+        </p:txBody>
+      </p:sp>
+      <p:sp>
+        <p:nvSpPr>
+          <p:cNvPr id="4" name="Rounded Rectangle 3"/>
+          <p:cNvSpPr/>
+          <p:nvPr/>
+        </p:nvSpPr>
+        <p:spPr>
+          <a:xfrm>
+            <a:off x="457200" y="1481328"/>
+            <a:ext cx="3551834" cy="841248"/>
+          </a:xfrm>
+          <a:prstGeom prst="roundRect">
+            <a:avLst>
+              <a:gd name="adj" fmla="val 13043"/>
+            </a:avLst>
+          </a:prstGeom>
+          <a:solidFill>
+            <a:srgbClr val="1C75C9"/>
+          </a:solidFill>
+          <a:ln>
+            <a:noFill/>
+          </a:ln>
+        </p:spPr>
+        <p:style>
+          <a:lnRef idx="1">
+            <a:schemeClr val="accent1"/>
+          </a:lnRef>
+          <a:fillRef idx="3">
+            <a:schemeClr val="accent1"/>
+          </a:fillRef>
+          <a:effectRef idx="2">
+            <a:schemeClr val="accent1"/>
+          </a:effectRef>
+          <a:fontRef idx="minor">
+            <a:schemeClr val="lt1"/>
+          </a:fontRef>
+        </p:style>
+        <p:txBody>
+          <a:bodyPr rtlCol="0" anchor="ctr"/>
+          <a:lstStyle/>
+          <a:p>
+            <a:endParaRPr/>
+          </a:p>
+        </p:txBody>
+      </p:sp>
+      <p:sp>
+        <p:nvSpPr>
+          <p:cNvPr id="5" name="TextBox 4"/>
+          <p:cNvSpPr txBox="1"/>
+          <p:nvPr/>
+        </p:nvSpPr>
+        <p:spPr>
+          <a:xfrm>
+            <a:off x="566928" y="1572768"/>
+            <a:ext cx="3332378" cy="457200"/>
+          </a:xfrm>
+          <a:prstGeom prst="rect">
+            <a:avLst/>
+          </a:prstGeom>
+          <a:noFill/>
+        </p:spPr>
+        <p:txBody>
+          <a:bodyPr wrap="square" lIns="45720" tIns="18288" rIns="45720" bIns="18288" anchor="ctr">
+            <a:spAutoFit/>
+          </a:bodyPr>
+          <a:lstStyle/>
+          <a:p>
+            <a:pPr algn="ctr">
+              <a:lnSpc>
+                <a:spcPct val="110000"/>
+              </a:lnSpc>
+            </a:pPr>
+            <a:r>
+              <a:rPr sz="1400" b="1">
+                <a:solidFill>
+                  <a:srgbClr val="FFFFFF"/>
+                </a:solidFill>
+                <a:latin typeface="Noto Sans KR"/>
+              </a:rPr>
+              <a:t>AI 보안 기초 및 안전한 활용</a:t>
+            </a:r>
+          </a:p>
+        </p:txBody>
+      </p:sp>
+      <p:sp>
+        <p:nvSpPr>
+          <p:cNvPr id="6" name="TextBox 5"/>
+          <p:cNvSpPr txBox="1"/>
+          <p:nvPr/>
+        </p:nvSpPr>
+        <p:spPr>
+          <a:xfrm>
+            <a:off x="566928" y="2011680"/>
+            <a:ext cx="3332378" cy="237744"/>
+          </a:xfrm>
+          <a:prstGeom prst="rect">
+            <a:avLst/>
+          </a:prstGeom>
+          <a:noFill/>
+        </p:spPr>
+        <p:txBody>
+          <a:bodyPr wrap="square" lIns="45720" tIns="18288" rIns="45720" bIns="18288" anchor="ctr">
+            <a:spAutoFit/>
+          </a:bodyPr>
+          <a:lstStyle/>
+          <a:p>
+            <a:pPr algn="ctr"/>
+            <a:r>
+              <a:rPr sz="1050" b="1">
+                <a:solidFill>
+                  <a:srgbClr val="FFFFFF"/>
+                </a:solidFill>
+                <a:latin typeface="Noto Sans KR"/>
+              </a:rPr>
+              <a:t>초급 (Beginner)</a:t>
+            </a:r>
+          </a:p>
+        </p:txBody>
+      </p:sp>
+      <p:sp>
+        <p:nvSpPr>
+          <p:cNvPr id="7" name="Rounded Rectangle 6"/>
+          <p:cNvSpPr/>
+          <p:nvPr/>
+        </p:nvSpPr>
+        <p:spPr>
+          <a:xfrm>
+            <a:off x="457200" y="2468880"/>
+            <a:ext cx="3551834" cy="1947672"/>
+          </a:xfrm>
+          <a:prstGeom prst="roundRect">
+            <a:avLst>
+              <a:gd name="adj" fmla="val 3755"/>
+            </a:avLst>
+          </a:prstGeom>
+          <a:solidFill>
+            <a:srgbClr val="FFFFFF"/>
+          </a:solidFill>
+          <a:ln w="12700">
+            <a:solidFill>
+              <a:srgbClr val="E2E8F0"/>
+            </a:solidFill>
+          </a:ln>
+        </p:spPr>
+        <p:style>
+          <a:lnRef idx="1">
+            <a:schemeClr val="accent1"/>
+          </a:lnRef>
+          <a:fillRef idx="3">
+            <a:schemeClr val="accent1"/>
+          </a:fillRef>
+          <a:effectRef idx="2">
+            <a:schemeClr val="accent1"/>
+          </a:effectRef>
+          <a:fontRef idx="minor">
+            <a:schemeClr val="lt1"/>
+          </a:fontRef>
+        </p:style>
+        <p:txBody>
+          <a:bodyPr rtlCol="0" anchor="ctr"/>
+          <a:lstStyle/>
+          <a:p>
+            <a:endParaRPr/>
+          </a:p>
+        </p:txBody>
+      </p:sp>
+      <p:sp>
+        <p:nvSpPr>
+          <p:cNvPr id="8" name="Rectangle 7"/>
+          <p:cNvSpPr/>
+          <p:nvPr/>
+        </p:nvSpPr>
+        <p:spPr>
+          <a:xfrm>
+            <a:off x="457200" y="2560320"/>
+            <a:ext cx="64008" cy="1764792"/>
+          </a:xfrm>
+          <a:prstGeom prst="rect">
+            <a:avLst/>
+          </a:prstGeom>
+          <a:solidFill>
+            <a:srgbClr val="1C75C9"/>
+          </a:solidFill>
+          <a:ln>
+            <a:noFill/>
+          </a:ln>
+        </p:spPr>
+        <p:style>
+          <a:lnRef idx="1">
+            <a:schemeClr val="accent1"/>
+          </a:lnRef>
+          <a:fillRef idx="3">
+            <a:schemeClr val="accent1"/>
+          </a:fillRef>
+          <a:effectRef idx="2">
+            <a:schemeClr val="accent1"/>
+          </a:effectRef>
+          <a:fontRef idx="minor">
+            <a:schemeClr val="lt1"/>
+          </a:fontRef>
+        </p:style>
+        <p:txBody>
+          <a:bodyPr rtlCol="0" anchor="ctr"/>
+          <a:lstStyle/>
+          <a:p>
+            <a:endParaRPr/>
+          </a:p>
+        </p:txBody>
+      </p:sp>
+      <p:sp>
+        <p:nvSpPr>
+          <p:cNvPr id="9" name="TextBox 8"/>
+          <p:cNvSpPr txBox="1"/>
+          <p:nvPr/>
+        </p:nvSpPr>
+        <p:spPr>
+          <a:xfrm>
+            <a:off x="694944" y="2560320"/>
+            <a:ext cx="3167786" cy="237744"/>
+          </a:xfrm>
+          <a:prstGeom prst="rect">
+            <a:avLst/>
+          </a:prstGeom>
+          <a:noFill/>
+        </p:spPr>
+        <p:txBody>
+          <a:bodyPr wrap="square" lIns="45720" tIns="18288" rIns="45720" bIns="18288" anchor="t">
+            <a:spAutoFit/>
+          </a:bodyPr>
+          <a:lstStyle/>
+          <a:p>
+            <a:pPr algn="l"/>
+            <a:r>
+              <a:rPr sz="1200" b="1">
+                <a:solidFill>
+                  <a:srgbClr val="1C75C9"/>
+                </a:solidFill>
+                <a:latin typeface="Noto Sans KR"/>
+              </a:rPr>
+              <a:t>1과정</a:t>
+            </a:r>
+          </a:p>
+        </p:txBody>
+      </p:sp>
+      <p:sp>
+        <p:nvSpPr>
+          <p:cNvPr id="10" name="TextBox 9"/>
+          <p:cNvSpPr txBox="1"/>
+          <p:nvPr/>
+        </p:nvSpPr>
+        <p:spPr>
+          <a:xfrm>
+            <a:off x="694944" y="2816352"/>
+            <a:ext cx="3167786" cy="428487"/>
+          </a:xfrm>
+          <a:prstGeom prst="rect">
+            <a:avLst/>
+          </a:prstGeom>
+          <a:noFill/>
+        </p:spPr>
+        <p:txBody>
+          <a:bodyPr wrap="square" lIns="45720" tIns="18288" rIns="45720" bIns="18288" anchor="t">
+            <a:spAutoFit/>
+          </a:bodyPr>
+          <a:lstStyle/>
+          <a:p>
+            <a:pPr algn="l">
+              <a:lnSpc>
+                <a:spcPct val="112000"/>
+              </a:lnSpc>
+            </a:pPr>
+            <a:r>
+              <a:rPr sz="1300" b="1">
+                <a:solidFill>
+                  <a:srgbClr val="1E293B"/>
+                </a:solidFill>
+                <a:latin typeface="Noto Sans KR"/>
+              </a:rPr>
+              <a:t>AI 보안의 이해</a:t>
+            </a:r>
+          </a:p>
+        </p:txBody>
+      </p:sp>
+      <p:sp>
+        <p:nvSpPr>
+          <p:cNvPr id="11" name="TextBox 10"/>
+          <p:cNvSpPr txBox="1"/>
+          <p:nvPr/>
+        </p:nvSpPr>
+        <p:spPr>
+          <a:xfrm>
+            <a:off x="694944" y="3290559"/>
+            <a:ext cx="3167786" cy="1016264"/>
+          </a:xfrm>
+          <a:prstGeom prst="rect">
+            <a:avLst/>
+          </a:prstGeom>
+          <a:noFill/>
+        </p:spPr>
+        <p:txBody>
+          <a:bodyPr wrap="square" lIns="45720" tIns="18288" rIns="45720" bIns="18288" anchor="t">
+            <a:spAutoFit/>
+          </a:bodyPr>
+          <a:lstStyle/>
+          <a:p>
+            <a:pPr algn="l">
+              <a:lnSpc>
+                <a:spcPct val="130000"/>
+              </a:lnSpc>
+            </a:pPr>
+            <a:r>
+              <a:rPr sz="1200" b="0">
+                <a:solidFill>
+                  <a:srgbClr val="475569"/>
+                </a:solidFill>
+                <a:latin typeface="Noto Sans KR"/>
+              </a:rPr>
+              <a:t>·  AI 기본 원리 및 위협 모델링
+·  프롬프트 인젝션 위협 요소 분석</a:t>
+            </a:r>
+          </a:p>
+        </p:txBody>
+      </p:sp>
+      <p:sp>
+        <p:nvSpPr>
+          <p:cNvPr id="12" name="Rounded Rectangle 11"/>
+          <p:cNvSpPr/>
+          <p:nvPr/>
+        </p:nvSpPr>
+        <p:spPr>
+          <a:xfrm>
+            <a:off x="457200" y="4562856"/>
+            <a:ext cx="3551834" cy="1947672"/>
+          </a:xfrm>
+          <a:prstGeom prst="roundRect">
+            <a:avLst>
+              <a:gd name="adj" fmla="val 3755"/>
+            </a:avLst>
+          </a:prstGeom>
+          <a:solidFill>
+            <a:srgbClr val="FFFFFF"/>
+          </a:solidFill>
+          <a:ln w="12700">
+            <a:solidFill>
+              <a:srgbClr val="E2E8F0"/>
+            </a:solidFill>
+          </a:ln>
+        </p:spPr>
+        <p:style>
+          <a:lnRef idx="1">
+            <a:schemeClr val="accent1"/>
+          </a:lnRef>
+          <a:fillRef idx="3">
+            <a:schemeClr val="accent1"/>
+          </a:fillRef>
+          <a:effectRef idx="2">
+            <a:schemeClr val="accent1"/>
+          </a:effectRef>
+          <a:fontRef idx="minor">
+            <a:schemeClr val="lt1"/>
+          </a:fontRef>
+        </p:style>
+        <p:txBody>
+          <a:bodyPr rtlCol="0" anchor="ctr"/>
+          <a:lstStyle/>
+          <a:p>
+            <a:endParaRPr/>
+          </a:p>
+        </p:txBody>
+      </p:sp>
+      <p:sp>
+        <p:nvSpPr>
+          <p:cNvPr id="13" name="Rectangle 12"/>
+          <p:cNvSpPr/>
+          <p:nvPr/>
+        </p:nvSpPr>
+        <p:spPr>
+          <a:xfrm>
+            <a:off x="457200" y="4654296"/>
+            <a:ext cx="64008" cy="1764792"/>
+          </a:xfrm>
+          <a:prstGeom prst="rect">
+            <a:avLst/>
+          </a:prstGeom>
+          <a:solidFill>
+            <a:srgbClr val="1C75C9"/>
+          </a:solidFill>
+          <a:ln>
+            <a:noFill/>
+          </a:ln>
+        </p:spPr>
+        <p:style>
+          <a:lnRef idx="1">
+            <a:schemeClr val="accent1"/>
+          </a:lnRef>
+          <a:fillRef idx="3">
+            <a:schemeClr val="accent1"/>
+          </a:fillRef>
+          <a:effectRef idx="2">
+            <a:schemeClr val="accent1"/>
+          </a:effectRef>
+          <a:fontRef idx="minor">
+            <a:schemeClr val="lt1"/>
+          </a:fontRef>
+        </p:style>
+        <p:txBody>
+          <a:bodyPr rtlCol="0" anchor="ctr"/>
+          <a:lstStyle/>
+          <a:p>
+            <a:endParaRPr/>
+          </a:p>
+        </p:txBody>
+      </p:sp>
+      <p:sp>
+        <p:nvSpPr>
+          <p:cNvPr id="14" name="TextBox 13"/>
+          <p:cNvSpPr txBox="1"/>
+          <p:nvPr/>
+        </p:nvSpPr>
+        <p:spPr>
+          <a:xfrm>
+            <a:off x="694944" y="4654296"/>
+            <a:ext cx="3167786" cy="237744"/>
+          </a:xfrm>
+          <a:prstGeom prst="rect">
+            <a:avLst/>
+          </a:prstGeom>
+          <a:noFill/>
+        </p:spPr>
+        <p:txBody>
+          <a:bodyPr wrap="square" lIns="45720" tIns="18288" rIns="45720" bIns="18288" anchor="t">
+            <a:spAutoFit/>
+          </a:bodyPr>
+          <a:lstStyle/>
+          <a:p>
+            <a:pPr algn="l"/>
+            <a:r>
+              <a:rPr sz="1200" b="1">
+                <a:solidFill>
+                  <a:srgbClr val="1C75C9"/>
+                </a:solidFill>
+                <a:latin typeface="Noto Sans KR"/>
+              </a:rPr>
+              <a:t>2과정</a:t>
+            </a:r>
+          </a:p>
+        </p:txBody>
+      </p:sp>
+      <p:sp>
+        <p:nvSpPr>
+          <p:cNvPr id="15" name="TextBox 14"/>
+          <p:cNvSpPr txBox="1"/>
+          <p:nvPr/>
+        </p:nvSpPr>
+        <p:spPr>
+          <a:xfrm>
+            <a:off x="694944" y="4910328"/>
+            <a:ext cx="3167786" cy="428487"/>
+          </a:xfrm>
+          <a:prstGeom prst="rect">
+            <a:avLst/>
+          </a:prstGeom>
+          <a:noFill/>
+        </p:spPr>
+        <p:txBody>
+          <a:bodyPr wrap="square" lIns="45720" tIns="18288" rIns="45720" bIns="18288" anchor="t">
+            <a:spAutoFit/>
+          </a:bodyPr>
+          <a:lstStyle/>
+          <a:p>
+            <a:pPr algn="l">
+              <a:lnSpc>
+                <a:spcPct val="112000"/>
+              </a:lnSpc>
+            </a:pPr>
+            <a:r>
+              <a:rPr sz="1300" b="1">
+                <a:solidFill>
+                  <a:srgbClr val="1E293B"/>
+                </a:solidFill>
+                <a:latin typeface="Noto Sans KR"/>
+              </a:rPr>
+              <a:t>AI 보안 업무 자동화 및 활용</a:t>
+            </a:r>
+          </a:p>
+        </p:txBody>
+      </p:sp>
+      <p:sp>
+        <p:nvSpPr>
+          <p:cNvPr id="16" name="TextBox 15"/>
+          <p:cNvSpPr txBox="1"/>
+          <p:nvPr/>
+        </p:nvSpPr>
+        <p:spPr>
+          <a:xfrm>
+            <a:off x="694944" y="5384535"/>
+            <a:ext cx="3167786" cy="1016264"/>
+          </a:xfrm>
+          <a:prstGeom prst="rect">
+            <a:avLst/>
+          </a:prstGeom>
+          <a:noFill/>
+        </p:spPr>
+        <p:txBody>
+          <a:bodyPr wrap="square" lIns="45720" tIns="18288" rIns="45720" bIns="18288" anchor="t">
+            <a:spAutoFit/>
+          </a:bodyPr>
+          <a:lstStyle/>
+          <a:p>
+            <a:pPr algn="l">
+              <a:lnSpc>
+                <a:spcPct val="130000"/>
+              </a:lnSpc>
+            </a:pPr>
+            <a:r>
+              <a:rPr sz="1200" b="0">
+                <a:solidFill>
+                  <a:srgbClr val="475569"/>
+                </a:solidFill>
+                <a:latin typeface="Noto Sans KR"/>
+              </a:rPr>
+              <a:t>·  생성형 AI 기반 보안업무 자동화 기초
+·  민감 정보 유출 방지 및 안전한 개발환경 구축</a:t>
+            </a:r>
+          </a:p>
+        </p:txBody>
+      </p:sp>
+      <p:sp>
+        <p:nvSpPr>
+          <p:cNvPr id="17" name="Rounded Rectangle 16"/>
+          <p:cNvSpPr/>
+          <p:nvPr/>
+        </p:nvSpPr>
+        <p:spPr>
+          <a:xfrm>
+            <a:off x="4319930" y="1481328"/>
+            <a:ext cx="3551834" cy="841248"/>
+          </a:xfrm>
+          <a:prstGeom prst="roundRect">
+            <a:avLst>
+              <a:gd name="adj" fmla="val 13043"/>
+            </a:avLst>
+          </a:prstGeom>
+          <a:solidFill>
+            <a:srgbClr val="13AAED"/>
+          </a:solidFill>
+          <a:ln>
+            <a:noFill/>
+          </a:ln>
+        </p:spPr>
+        <p:style>
+          <a:lnRef idx="1">
+            <a:schemeClr val="accent1"/>
+          </a:lnRef>
+          <a:fillRef idx="3">
+            <a:schemeClr val="accent1"/>
+          </a:fillRef>
+          <a:effectRef idx="2">
+            <a:schemeClr val="accent1"/>
+          </a:effectRef>
+          <a:fontRef idx="minor">
+            <a:schemeClr val="lt1"/>
+          </a:fontRef>
+        </p:style>
+        <p:txBody>
+          <a:bodyPr rtlCol="0" anchor="ctr"/>
+          <a:lstStyle/>
+          <a:p>
+            <a:endParaRPr/>
+          </a:p>
+        </p:txBody>
+      </p:sp>
+      <p:sp>
+        <p:nvSpPr>
+          <p:cNvPr id="18" name="TextBox 17"/>
+          <p:cNvSpPr txBox="1"/>
+          <p:nvPr/>
+        </p:nvSpPr>
+        <p:spPr>
+          <a:xfrm>
+            <a:off x="4429658" y="1572768"/>
+            <a:ext cx="3332378" cy="457200"/>
+          </a:xfrm>
+          <a:prstGeom prst="rect">
+            <a:avLst/>
+          </a:prstGeom>
+          <a:noFill/>
+        </p:spPr>
+        <p:txBody>
+          <a:bodyPr wrap="square" lIns="45720" tIns="18288" rIns="45720" bIns="18288" anchor="ctr">
+            <a:spAutoFit/>
+          </a:bodyPr>
+          <a:lstStyle/>
+          <a:p>
+            <a:pPr algn="ctr">
+              <a:lnSpc>
+                <a:spcPct val="110000"/>
+              </a:lnSpc>
+            </a:pPr>
+            <a:r>
+              <a:rPr sz="1400" b="1">
+                <a:solidFill>
+                  <a:srgbClr val="FFFFFF"/>
+                </a:solidFill>
+                <a:latin typeface="Noto Sans KR"/>
+              </a:rPr>
+              <a:t>AI 인프라 구축 및 지능형 보안</a:t>
+            </a:r>
+          </a:p>
+        </p:txBody>
+      </p:sp>
+      <p:sp>
+        <p:nvSpPr>
+          <p:cNvPr id="19" name="TextBox 18"/>
+          <p:cNvSpPr txBox="1"/>
+          <p:nvPr/>
+        </p:nvSpPr>
+        <p:spPr>
+          <a:xfrm>
+            <a:off x="4429658" y="2011680"/>
+            <a:ext cx="3332378" cy="237744"/>
+          </a:xfrm>
+          <a:prstGeom prst="rect">
+            <a:avLst/>
+          </a:prstGeom>
+          <a:noFill/>
+        </p:spPr>
+        <p:txBody>
+          <a:bodyPr wrap="square" lIns="45720" tIns="18288" rIns="45720" bIns="18288" anchor="ctr">
+            <a:spAutoFit/>
+          </a:bodyPr>
+          <a:lstStyle/>
+          <a:p>
+            <a:pPr algn="ctr"/>
+            <a:r>
+              <a:rPr sz="1050" b="1">
+                <a:solidFill>
+                  <a:srgbClr val="FFFFFF"/>
+                </a:solidFill>
+                <a:latin typeface="Noto Sans KR"/>
+              </a:rPr>
+              <a:t>중급 (Intermediate)</a:t>
+            </a:r>
+          </a:p>
+        </p:txBody>
+      </p:sp>
+      <p:sp>
+        <p:nvSpPr>
+          <p:cNvPr id="20" name="Rounded Rectangle 19"/>
+          <p:cNvSpPr/>
+          <p:nvPr/>
+        </p:nvSpPr>
+        <p:spPr>
+          <a:xfrm>
+            <a:off x="4319930" y="2468880"/>
+            <a:ext cx="3551834" cy="1249679"/>
+          </a:xfrm>
+          <a:prstGeom prst="roundRect">
+            <a:avLst>
+              <a:gd name="adj" fmla="val 5853"/>
+            </a:avLst>
+          </a:prstGeom>
+          <a:solidFill>
+            <a:srgbClr val="FFFFFF"/>
+          </a:solidFill>
+          <a:ln w="12700">
+            <a:solidFill>
+              <a:srgbClr val="E2E8F0"/>
+            </a:solidFill>
+          </a:ln>
+        </p:spPr>
+        <p:style>
+          <a:lnRef idx="1">
+            <a:schemeClr val="accent1"/>
+          </a:lnRef>
+          <a:fillRef idx="3">
+            <a:schemeClr val="accent1"/>
+          </a:fillRef>
+          <a:effectRef idx="2">
+            <a:schemeClr val="accent1"/>
+          </a:effectRef>
+          <a:fontRef idx="minor">
+            <a:schemeClr val="lt1"/>
+          </a:fontRef>
+        </p:style>
+        <p:txBody>
+          <a:bodyPr rtlCol="0" anchor="ctr"/>
+          <a:lstStyle/>
+          <a:p>
+            <a:endParaRPr/>
+          </a:p>
+        </p:txBody>
+      </p:sp>
+      <p:sp>
+        <p:nvSpPr>
+          <p:cNvPr id="21" name="Rectangle 20"/>
+          <p:cNvSpPr/>
+          <p:nvPr/>
+        </p:nvSpPr>
+        <p:spPr>
+          <a:xfrm>
+            <a:off x="4319930" y="2560320"/>
+            <a:ext cx="64008" cy="1066799"/>
+          </a:xfrm>
+          <a:prstGeom prst="rect">
+            <a:avLst/>
+          </a:prstGeom>
+          <a:solidFill>
+            <a:srgbClr val="13AAED"/>
+          </a:solidFill>
+          <a:ln>
+            <a:noFill/>
+          </a:ln>
+        </p:spPr>
+        <p:style>
+          <a:lnRef idx="1">
+            <a:schemeClr val="accent1"/>
+          </a:lnRef>
+          <a:fillRef idx="3">
+            <a:schemeClr val="accent1"/>
+          </a:fillRef>
+          <a:effectRef idx="2">
+            <a:schemeClr val="accent1"/>
+          </a:effectRef>
+          <a:fontRef idx="minor">
+            <a:schemeClr val="lt1"/>
+          </a:fontRef>
+        </p:style>
+        <p:txBody>
+          <a:bodyPr rtlCol="0" anchor="ctr"/>
+          <a:lstStyle/>
+          <a:p>
+            <a:endParaRPr/>
+          </a:p>
+        </p:txBody>
+      </p:sp>
+      <p:sp>
+        <p:nvSpPr>
+          <p:cNvPr id="22" name="TextBox 21"/>
+          <p:cNvSpPr txBox="1"/>
+          <p:nvPr/>
+        </p:nvSpPr>
+        <p:spPr>
+          <a:xfrm>
+            <a:off x="4557674" y="2560320"/>
+            <a:ext cx="3167786" cy="237744"/>
+          </a:xfrm>
+          <a:prstGeom prst="rect">
+            <a:avLst/>
+          </a:prstGeom>
+          <a:noFill/>
+        </p:spPr>
+        <p:txBody>
+          <a:bodyPr wrap="square" lIns="45720" tIns="18288" rIns="45720" bIns="18288" anchor="t">
+            <a:spAutoFit/>
+          </a:bodyPr>
+          <a:lstStyle/>
+          <a:p>
+            <a:pPr algn="l"/>
+            <a:r>
+              <a:rPr sz="1200" b="1">
+                <a:solidFill>
+                  <a:srgbClr val="13AAED"/>
+                </a:solidFill>
+                <a:latin typeface="Noto Sans KR"/>
+              </a:rPr>
+              <a:t>3과정</a:t>
+            </a:r>
+          </a:p>
+        </p:txBody>
+      </p:sp>
+      <p:sp>
+        <p:nvSpPr>
+          <p:cNvPr id="23" name="TextBox 22"/>
+          <p:cNvSpPr txBox="1"/>
+          <p:nvPr/>
+        </p:nvSpPr>
+        <p:spPr>
+          <a:xfrm>
+            <a:off x="4557674" y="2816352"/>
+            <a:ext cx="3167786" cy="274929"/>
+          </a:xfrm>
+          <a:prstGeom prst="rect">
+            <a:avLst/>
+          </a:prstGeom>
+          <a:noFill/>
+        </p:spPr>
+        <p:txBody>
+          <a:bodyPr wrap="square" lIns="45720" tIns="18288" rIns="45720" bIns="18288" anchor="t">
+            <a:spAutoFit/>
+          </a:bodyPr>
+          <a:lstStyle/>
+          <a:p>
+            <a:pPr algn="l">
+              <a:lnSpc>
+                <a:spcPct val="112000"/>
+              </a:lnSpc>
+            </a:pPr>
+            <a:r>
+              <a:rPr sz="1200" b="1">
+                <a:solidFill>
+                  <a:srgbClr val="1E293B"/>
+                </a:solidFill>
+                <a:latin typeface="Noto Sans KR"/>
+              </a:rPr>
+              <a:t>안전한 로컬 LLM 구축</a:t>
+            </a:r>
+          </a:p>
+        </p:txBody>
+      </p:sp>
+      <p:sp>
+        <p:nvSpPr>
+          <p:cNvPr id="24" name="TextBox 23"/>
+          <p:cNvSpPr txBox="1"/>
+          <p:nvPr/>
+        </p:nvSpPr>
+        <p:spPr>
+          <a:xfrm>
+            <a:off x="4557674" y="3137001"/>
+            <a:ext cx="3167786" cy="471830"/>
+          </a:xfrm>
+          <a:prstGeom prst="rect">
+            <a:avLst/>
+          </a:prstGeom>
+          <a:noFill/>
+        </p:spPr>
+        <p:txBody>
+          <a:bodyPr wrap="square" lIns="45720" tIns="18288" rIns="45720" bIns="18288" anchor="t">
+            <a:spAutoFit/>
+          </a:bodyPr>
+          <a:lstStyle/>
+          <a:p>
+            <a:pPr algn="l">
+              <a:lnSpc>
+                <a:spcPct val="130000"/>
+              </a:lnSpc>
+            </a:pPr>
+            <a:r>
+              <a:rPr sz="1000" b="0">
+                <a:solidFill>
+                  <a:srgbClr val="475569"/>
+                </a:solidFill>
+                <a:latin typeface="Noto Sans KR"/>
+              </a:rPr>
+              <a:t>·  온프레미스 sLLM 독립망 구축
+·  RAG 파이프라인 연계 및 파인튜닝</a:t>
+            </a:r>
+          </a:p>
+        </p:txBody>
+      </p:sp>
+      <p:sp>
+        <p:nvSpPr>
+          <p:cNvPr id="25" name="Rounded Rectangle 24"/>
+          <p:cNvSpPr/>
+          <p:nvPr/>
+        </p:nvSpPr>
+        <p:spPr>
+          <a:xfrm>
+            <a:off x="4319930" y="3864864"/>
+            <a:ext cx="3551834" cy="1249679"/>
+          </a:xfrm>
+          <a:prstGeom prst="roundRect">
+            <a:avLst>
+              <a:gd name="adj" fmla="val 5853"/>
+            </a:avLst>
+          </a:prstGeom>
+          <a:solidFill>
+            <a:srgbClr val="FFFFFF"/>
+          </a:solidFill>
+          <a:ln w="12700">
+            <a:solidFill>
+              <a:srgbClr val="E2E8F0"/>
+            </a:solidFill>
+          </a:ln>
+        </p:spPr>
+        <p:style>
+          <a:lnRef idx="1">
+            <a:schemeClr val="accent1"/>
+          </a:lnRef>
+          <a:fillRef idx="3">
+            <a:schemeClr val="accent1"/>
+          </a:fillRef>
+          <a:effectRef idx="2">
+            <a:schemeClr val="accent1"/>
+          </a:effectRef>
+          <a:fontRef idx="minor">
+            <a:schemeClr val="lt1"/>
+          </a:fontRef>
+        </p:style>
+        <p:txBody>
+          <a:bodyPr rtlCol="0" anchor="ctr"/>
+          <a:lstStyle/>
+          <a:p>
+            <a:endParaRPr/>
+          </a:p>
+        </p:txBody>
+      </p:sp>
+      <p:sp>
+        <p:nvSpPr>
+          <p:cNvPr id="26" name="Rectangle 25"/>
+          <p:cNvSpPr/>
+          <p:nvPr/>
+        </p:nvSpPr>
+        <p:spPr>
+          <a:xfrm>
+            <a:off x="4319930" y="3956303"/>
+            <a:ext cx="64008" cy="1066799"/>
+          </a:xfrm>
+          <a:prstGeom prst="rect">
+            <a:avLst/>
+          </a:prstGeom>
+          <a:solidFill>
+            <a:srgbClr val="13AAED"/>
+          </a:solidFill>
+          <a:ln>
+            <a:noFill/>
+          </a:ln>
+        </p:spPr>
+        <p:style>
+          <a:lnRef idx="1">
+            <a:schemeClr val="accent1"/>
+          </a:lnRef>
+          <a:fillRef idx="3">
+            <a:schemeClr val="accent1"/>
+          </a:fillRef>
+          <a:effectRef idx="2">
+            <a:schemeClr val="accent1"/>
+          </a:effectRef>
+          <a:fontRef idx="minor">
+            <a:schemeClr val="lt1"/>
+          </a:fontRef>
+        </p:style>
+        <p:txBody>
+          <a:bodyPr rtlCol="0" anchor="ctr"/>
+          <a:lstStyle/>
+          <a:p>
+            <a:endParaRPr/>
+          </a:p>
+        </p:txBody>
+      </p:sp>
+      <p:sp>
+        <p:nvSpPr>
+          <p:cNvPr id="27" name="TextBox 26"/>
+          <p:cNvSpPr txBox="1"/>
+          <p:nvPr/>
+        </p:nvSpPr>
+        <p:spPr>
+          <a:xfrm>
+            <a:off x="4557674" y="3956303"/>
+            <a:ext cx="3167786" cy="237744"/>
+          </a:xfrm>
+          <a:prstGeom prst="rect">
+            <a:avLst/>
+          </a:prstGeom>
+          <a:noFill/>
+        </p:spPr>
+        <p:txBody>
+          <a:bodyPr wrap="square" lIns="45720" tIns="18288" rIns="45720" bIns="18288" anchor="t">
+            <a:spAutoFit/>
+          </a:bodyPr>
+          <a:lstStyle/>
+          <a:p>
+            <a:pPr algn="l"/>
+            <a:r>
+              <a:rPr sz="1200" b="1">
+                <a:solidFill>
+                  <a:srgbClr val="13AAED"/>
+                </a:solidFill>
+                <a:latin typeface="Noto Sans KR"/>
+              </a:rPr>
+              <a:t>4과정</a:t>
+            </a:r>
+          </a:p>
+        </p:txBody>
+      </p:sp>
+      <p:sp>
+        <p:nvSpPr>
+          <p:cNvPr id="28" name="TextBox 27"/>
+          <p:cNvSpPr txBox="1"/>
+          <p:nvPr/>
+        </p:nvSpPr>
+        <p:spPr>
+          <a:xfrm>
+            <a:off x="4557674" y="4212336"/>
+            <a:ext cx="3167786" cy="274929"/>
+          </a:xfrm>
+          <a:prstGeom prst="rect">
+            <a:avLst/>
+          </a:prstGeom>
+          <a:noFill/>
+        </p:spPr>
+        <p:txBody>
+          <a:bodyPr wrap="square" lIns="45720" tIns="18288" rIns="45720" bIns="18288" anchor="t">
+            <a:spAutoFit/>
+          </a:bodyPr>
+          <a:lstStyle/>
+          <a:p>
+            <a:pPr algn="l">
+              <a:lnSpc>
+                <a:spcPct val="112000"/>
+              </a:lnSpc>
+            </a:pPr>
+            <a:r>
+              <a:rPr sz="1200" b="1">
+                <a:solidFill>
+                  <a:srgbClr val="1E293B"/>
+                </a:solidFill>
+                <a:latin typeface="Noto Sans KR"/>
+              </a:rPr>
+              <a:t>로컬 LLM 활용 사이버 보안</a:t>
+            </a:r>
+          </a:p>
+        </p:txBody>
+      </p:sp>
+      <p:sp>
+        <p:nvSpPr>
+          <p:cNvPr id="29" name="TextBox 28"/>
+          <p:cNvSpPr txBox="1"/>
+          <p:nvPr/>
+        </p:nvSpPr>
+        <p:spPr>
+          <a:xfrm>
+            <a:off x="4557674" y="4532985"/>
+            <a:ext cx="3167786" cy="471830"/>
+          </a:xfrm>
+          <a:prstGeom prst="rect">
+            <a:avLst/>
+          </a:prstGeom>
+          <a:noFill/>
+        </p:spPr>
+        <p:txBody>
+          <a:bodyPr wrap="square" lIns="45720" tIns="18288" rIns="45720" bIns="18288" anchor="t">
+            <a:spAutoFit/>
+          </a:bodyPr>
+          <a:lstStyle/>
+          <a:p>
+            <a:pPr algn="l">
+              <a:lnSpc>
+                <a:spcPct val="130000"/>
+              </a:lnSpc>
+            </a:pPr>
+            <a:r>
+              <a:rPr sz="1000" b="0">
+                <a:solidFill>
+                  <a:srgbClr val="475569"/>
+                </a:solidFill>
+                <a:latin typeface="Noto Sans KR"/>
+              </a:rPr>
+              <a:t>·  ML 기반 악성코드 및 변칙 분석
+·  SOAR/CTI 연계 통합 관제</a:t>
+            </a:r>
+          </a:p>
+        </p:txBody>
+      </p:sp>
+      <p:sp>
+        <p:nvSpPr>
+          <p:cNvPr id="30" name="Rounded Rectangle 29"/>
+          <p:cNvSpPr/>
+          <p:nvPr/>
+        </p:nvSpPr>
+        <p:spPr>
+          <a:xfrm>
+            <a:off x="4319930" y="5260848"/>
+            <a:ext cx="3551834" cy="1249679"/>
+          </a:xfrm>
+          <a:prstGeom prst="roundRect">
+            <a:avLst>
+              <a:gd name="adj" fmla="val 5853"/>
+            </a:avLst>
+          </a:prstGeom>
+          <a:solidFill>
+            <a:srgbClr val="FFFFFF"/>
+          </a:solidFill>
+          <a:ln w="12700">
+            <a:solidFill>
+              <a:srgbClr val="E2E8F0"/>
+            </a:solidFill>
+          </a:ln>
+        </p:spPr>
+        <p:style>
+          <a:lnRef idx="1">
+            <a:schemeClr val="accent1"/>
+          </a:lnRef>
+          <a:fillRef idx="3">
+            <a:schemeClr val="accent1"/>
+          </a:fillRef>
+          <a:effectRef idx="2">
+            <a:schemeClr val="accent1"/>
+          </a:effectRef>
+          <a:fontRef idx="minor">
+            <a:schemeClr val="lt1"/>
+          </a:fontRef>
+        </p:style>
+        <p:txBody>
+          <a:bodyPr rtlCol="0" anchor="ctr"/>
+          <a:lstStyle/>
+          <a:p>
+            <a:endParaRPr/>
+          </a:p>
+        </p:txBody>
+      </p:sp>
+      <p:sp>
+        <p:nvSpPr>
+          <p:cNvPr id="31" name="Rectangle 30"/>
+          <p:cNvSpPr/>
+          <p:nvPr/>
+        </p:nvSpPr>
+        <p:spPr>
+          <a:xfrm>
+            <a:off x="4319930" y="5352287"/>
+            <a:ext cx="64008" cy="1066799"/>
+          </a:xfrm>
+          <a:prstGeom prst="rect">
+            <a:avLst/>
+          </a:prstGeom>
+          <a:solidFill>
+            <a:srgbClr val="13AAED"/>
+          </a:solidFill>
+          <a:ln>
+            <a:noFill/>
+          </a:ln>
+        </p:spPr>
+        <p:style>
+          <a:lnRef idx="1">
+            <a:schemeClr val="accent1"/>
+          </a:lnRef>
+          <a:fillRef idx="3">
+            <a:schemeClr val="accent1"/>
+          </a:fillRef>
+          <a:effectRef idx="2">
+            <a:schemeClr val="accent1"/>
+          </a:effectRef>
+          <a:fontRef idx="minor">
+            <a:schemeClr val="lt1"/>
+          </a:fontRef>
+        </p:style>
+        <p:txBody>
+          <a:bodyPr rtlCol="0" anchor="ctr"/>
+          <a:lstStyle/>
+          <a:p>
+            <a:endParaRPr/>
+          </a:p>
+        </p:txBody>
+      </p:sp>
+      <p:sp>
+        <p:nvSpPr>
+          <p:cNvPr id="32" name="TextBox 31"/>
+          <p:cNvSpPr txBox="1"/>
+          <p:nvPr/>
+        </p:nvSpPr>
+        <p:spPr>
+          <a:xfrm>
+            <a:off x="4557674" y="5352287"/>
+            <a:ext cx="3167786" cy="237744"/>
+          </a:xfrm>
+          <a:prstGeom prst="rect">
+            <a:avLst/>
+          </a:prstGeom>
+          <a:noFill/>
+        </p:spPr>
+        <p:txBody>
+          <a:bodyPr wrap="square" lIns="45720" tIns="18288" rIns="45720" bIns="18288" anchor="t">
+            <a:spAutoFit/>
+          </a:bodyPr>
+          <a:lstStyle/>
+          <a:p>
+            <a:pPr algn="l"/>
+            <a:r>
+              <a:rPr sz="1200" b="1">
+                <a:solidFill>
+                  <a:srgbClr val="13AAED"/>
+                </a:solidFill>
+                <a:latin typeface="Noto Sans KR"/>
+              </a:rPr>
+              <a:t>5과정</a:t>
+            </a:r>
+          </a:p>
+        </p:txBody>
+      </p:sp>
+      <p:sp>
+        <p:nvSpPr>
+          <p:cNvPr id="33" name="TextBox 32"/>
+          <p:cNvSpPr txBox="1"/>
+          <p:nvPr/>
+        </p:nvSpPr>
+        <p:spPr>
+          <a:xfrm>
+            <a:off x="4557674" y="5608320"/>
+            <a:ext cx="3167786" cy="274929"/>
+          </a:xfrm>
+          <a:prstGeom prst="rect">
+            <a:avLst/>
+          </a:prstGeom>
+          <a:noFill/>
+        </p:spPr>
+        <p:txBody>
+          <a:bodyPr wrap="square" lIns="45720" tIns="18288" rIns="45720" bIns="18288" anchor="t">
+            <a:spAutoFit/>
+          </a:bodyPr>
+          <a:lstStyle/>
+          <a:p>
+            <a:pPr algn="l">
+              <a:lnSpc>
+                <a:spcPct val="112000"/>
+              </a:lnSpc>
+            </a:pPr>
+            <a:r>
+              <a:rPr sz="1200" b="1">
+                <a:solidFill>
+                  <a:srgbClr val="1E293B"/>
+                </a:solidFill>
+                <a:latin typeface="Noto Sans KR"/>
+              </a:rPr>
+              <a:t>Agentic AI(Mythos) 공격 대응</a:t>
+            </a:r>
+          </a:p>
+        </p:txBody>
+      </p:sp>
+      <p:sp>
+        <p:nvSpPr>
+          <p:cNvPr id="34" name="TextBox 33"/>
+          <p:cNvSpPr txBox="1"/>
+          <p:nvPr/>
+        </p:nvSpPr>
+        <p:spPr>
+          <a:xfrm>
+            <a:off x="4557674" y="5928969"/>
+            <a:ext cx="3167786" cy="471830"/>
+          </a:xfrm>
+          <a:prstGeom prst="rect">
+            <a:avLst/>
+          </a:prstGeom>
+          <a:noFill/>
+        </p:spPr>
+        <p:txBody>
+          <a:bodyPr wrap="square" lIns="45720" tIns="18288" rIns="45720" bIns="18288" anchor="t">
+            <a:spAutoFit/>
+          </a:bodyPr>
+          <a:lstStyle/>
+          <a:p>
+            <a:pPr algn="l">
+              <a:lnSpc>
+                <a:spcPct val="130000"/>
+              </a:lnSpc>
+            </a:pPr>
+            <a:r>
+              <a:rPr sz="900" b="0">
+                <a:solidFill>
+                  <a:srgbClr val="475569"/>
+                </a:solidFill>
+                <a:latin typeface="Noto Sans KR"/>
+              </a:rPr>
+              <a:t>·  미토스 쇼크 등 자율 해킹 분석
+·  LLM 활용 취약점 탐지·지능형 제로트러스트 구현</a:t>
+            </a:r>
+          </a:p>
+        </p:txBody>
+      </p:sp>
+      <p:sp>
+        <p:nvSpPr>
+          <p:cNvPr id="35" name="Rounded Rectangle 34"/>
+          <p:cNvSpPr/>
+          <p:nvPr/>
+        </p:nvSpPr>
+        <p:spPr>
+          <a:xfrm>
+            <a:off x="8182660" y="1481328"/>
+            <a:ext cx="3551834" cy="841248"/>
+          </a:xfrm>
+          <a:prstGeom prst="roundRect">
+            <a:avLst>
+              <a:gd name="adj" fmla="val 13043"/>
+            </a:avLst>
+          </a:prstGeom>
+          <a:solidFill>
+            <a:srgbClr val="059669"/>
+          </a:solidFill>
+          <a:ln>
+            <a:noFill/>
+          </a:ln>
+        </p:spPr>
+        <p:style>
+          <a:lnRef idx="1">
+            <a:schemeClr val="accent1"/>
+          </a:lnRef>
+          <a:fillRef idx="3">
+            <a:schemeClr val="accent1"/>
+          </a:fillRef>
+          <a:effectRef idx="2">
+            <a:schemeClr val="accent1"/>
+          </a:effectRef>
+          <a:fontRef idx="minor">
+            <a:schemeClr val="lt1"/>
+          </a:fontRef>
+        </p:style>
+        <p:txBody>
+          <a:bodyPr rtlCol="0" anchor="ctr"/>
+          <a:lstStyle/>
+          <a:p>
+            <a:endParaRPr/>
+          </a:p>
+        </p:txBody>
+      </p:sp>
+      <p:sp>
+        <p:nvSpPr>
+          <p:cNvPr id="36" name="TextBox 35"/>
+          <p:cNvSpPr txBox="1"/>
+          <p:nvPr/>
+        </p:nvSpPr>
+        <p:spPr>
+          <a:xfrm>
+            <a:off x="8292388" y="1572768"/>
+            <a:ext cx="3332378" cy="457200"/>
+          </a:xfrm>
+          <a:prstGeom prst="rect">
+            <a:avLst/>
+          </a:prstGeom>
+          <a:noFill/>
+        </p:spPr>
+        <p:txBody>
+          <a:bodyPr wrap="square" lIns="45720" tIns="18288" rIns="45720" bIns="18288" anchor="ctr">
+            <a:spAutoFit/>
+          </a:bodyPr>
+          <a:lstStyle/>
+          <a:p>
+            <a:pPr algn="ctr">
+              <a:lnSpc>
+                <a:spcPct val="110000"/>
+              </a:lnSpc>
+            </a:pPr>
+            <a:r>
+              <a:rPr sz="1400" b="1">
+                <a:solidFill>
+                  <a:srgbClr val="FFFFFF"/>
+                </a:solidFill>
+                <a:latin typeface="Noto Sans KR"/>
+              </a:rPr>
+              <a:t>LLM 심층 방어 및 회복</a:t>
+            </a:r>
+          </a:p>
+        </p:txBody>
+      </p:sp>
+      <p:sp>
+        <p:nvSpPr>
+          <p:cNvPr id="37" name="TextBox 36"/>
+          <p:cNvSpPr txBox="1"/>
+          <p:nvPr/>
+        </p:nvSpPr>
+        <p:spPr>
+          <a:xfrm>
+            <a:off x="8292388" y="2011680"/>
+            <a:ext cx="3332378" cy="237744"/>
+          </a:xfrm>
+          <a:prstGeom prst="rect">
+            <a:avLst/>
+          </a:prstGeom>
+          <a:noFill/>
+        </p:spPr>
+        <p:txBody>
+          <a:bodyPr wrap="square" lIns="45720" tIns="18288" rIns="45720" bIns="18288" anchor="ctr">
+            <a:spAutoFit/>
+          </a:bodyPr>
+          <a:lstStyle/>
+          <a:p>
+            <a:pPr algn="ctr"/>
+            <a:r>
+              <a:rPr sz="1050" b="1">
+                <a:solidFill>
+                  <a:srgbClr val="FFFFFF"/>
+                </a:solidFill>
+                <a:latin typeface="Noto Sans KR"/>
+              </a:rPr>
+              <a:t>고급 (Advanced)</a:t>
+            </a:r>
+          </a:p>
+        </p:txBody>
+      </p:sp>
+      <p:sp>
+        <p:nvSpPr>
+          <p:cNvPr id="38" name="Rounded Rectangle 37"/>
+          <p:cNvSpPr/>
+          <p:nvPr/>
+        </p:nvSpPr>
+        <p:spPr>
+          <a:xfrm>
+            <a:off x="8182660" y="2468880"/>
+            <a:ext cx="3551834" cy="1947672"/>
+          </a:xfrm>
+          <a:prstGeom prst="roundRect">
+            <a:avLst>
+              <a:gd name="adj" fmla="val 3755"/>
+            </a:avLst>
+          </a:prstGeom>
+          <a:solidFill>
+            <a:srgbClr val="FFFFFF"/>
+          </a:solidFill>
+          <a:ln w="12700">
+            <a:solidFill>
+              <a:srgbClr val="E2E8F0"/>
+            </a:solidFill>
+          </a:ln>
+        </p:spPr>
+        <p:style>
+          <a:lnRef idx="1">
+            <a:schemeClr val="accent1"/>
+          </a:lnRef>
+          <a:fillRef idx="3">
+            <a:schemeClr val="accent1"/>
+          </a:fillRef>
+          <a:effectRef idx="2">
+            <a:schemeClr val="accent1"/>
+          </a:effectRef>
+          <a:fontRef idx="minor">
+            <a:schemeClr val="lt1"/>
+          </a:fontRef>
+        </p:style>
+        <p:txBody>
+          <a:bodyPr rtlCol="0" anchor="ctr"/>
+          <a:lstStyle/>
+          <a:p>
+            <a:endParaRPr/>
+          </a:p>
+        </p:txBody>
+      </p:sp>
+      <p:sp>
+        <p:nvSpPr>
+          <p:cNvPr id="39" name="Rectangle 38"/>
+          <p:cNvSpPr/>
+          <p:nvPr/>
+        </p:nvSpPr>
+        <p:spPr>
+          <a:xfrm>
+            <a:off x="8182660" y="2560320"/>
+            <a:ext cx="64008" cy="1764792"/>
+          </a:xfrm>
+          <a:prstGeom prst="rect">
+            <a:avLst/>
+          </a:prstGeom>
+          <a:solidFill>
+            <a:srgbClr val="059669"/>
+          </a:solidFill>
+          <a:ln>
+            <a:noFill/>
+          </a:ln>
+        </p:spPr>
+        <p:style>
+          <a:lnRef idx="1">
+            <a:schemeClr val="accent1"/>
+          </a:lnRef>
+          <a:fillRef idx="3">
+            <a:schemeClr val="accent1"/>
+          </a:fillRef>
+          <a:effectRef idx="2">
+            <a:schemeClr val="accent1"/>
+          </a:effectRef>
+          <a:fontRef idx="minor">
+            <a:schemeClr val="lt1"/>
+          </a:fontRef>
+        </p:style>
+        <p:txBody>
+          <a:bodyPr rtlCol="0" anchor="ctr"/>
+          <a:lstStyle/>
+          <a:p>
+            <a:endParaRPr/>
+          </a:p>
+        </p:txBody>
+      </p:sp>
+      <p:sp>
+        <p:nvSpPr>
+          <p:cNvPr id="40" name="TextBox 39"/>
+          <p:cNvSpPr txBox="1"/>
+          <p:nvPr/>
+        </p:nvSpPr>
+        <p:spPr>
+          <a:xfrm>
+            <a:off x="8420404" y="2560320"/>
+            <a:ext cx="3167786" cy="237744"/>
+          </a:xfrm>
+          <a:prstGeom prst="rect">
+            <a:avLst/>
+          </a:prstGeom>
+          <a:noFill/>
+        </p:spPr>
+        <p:txBody>
+          <a:bodyPr wrap="square" lIns="45720" tIns="18288" rIns="45720" bIns="18288" anchor="t">
+            <a:spAutoFit/>
+          </a:bodyPr>
+          <a:lstStyle/>
+          <a:p>
+            <a:pPr algn="l"/>
+            <a:r>
+              <a:rPr sz="1200" b="1">
+                <a:solidFill>
+                  <a:srgbClr val="059669"/>
+                </a:solidFill>
+                <a:latin typeface="Noto Sans KR"/>
+              </a:rPr>
+              <a:t>6과정</a:t>
+            </a:r>
+          </a:p>
+        </p:txBody>
+      </p:sp>
+      <p:sp>
+        <p:nvSpPr>
+          <p:cNvPr id="41" name="TextBox 40"/>
+          <p:cNvSpPr txBox="1"/>
+          <p:nvPr/>
+        </p:nvSpPr>
+        <p:spPr>
+          <a:xfrm>
+            <a:off x="8420404" y="2816352"/>
+            <a:ext cx="3167786" cy="428487"/>
+          </a:xfrm>
+          <a:prstGeom prst="rect">
+            <a:avLst/>
+          </a:prstGeom>
+          <a:noFill/>
+        </p:spPr>
+        <p:txBody>
+          <a:bodyPr wrap="square" lIns="45720" tIns="18288" rIns="45720" bIns="18288" anchor="t">
+            <a:spAutoFit/>
+          </a:bodyPr>
+          <a:lstStyle/>
+          <a:p>
+            <a:pPr algn="l">
+              <a:lnSpc>
+                <a:spcPct val="112000"/>
+              </a:lnSpc>
+            </a:pPr>
+            <a:r>
+              <a:rPr sz="1300" b="1">
+                <a:solidFill>
+                  <a:srgbClr val="1E293B"/>
+                </a:solidFill>
+                <a:latin typeface="Noto Sans KR"/>
+              </a:rPr>
+              <a:t>LLM 취약점 진단 및 방어</a:t>
+            </a:r>
+          </a:p>
+        </p:txBody>
+      </p:sp>
+      <p:sp>
+        <p:nvSpPr>
+          <p:cNvPr id="42" name="TextBox 41"/>
+          <p:cNvSpPr txBox="1"/>
+          <p:nvPr/>
+        </p:nvSpPr>
+        <p:spPr>
+          <a:xfrm>
+            <a:off x="8420404" y="3290559"/>
+            <a:ext cx="3167786" cy="1016264"/>
+          </a:xfrm>
+          <a:prstGeom prst="rect">
+            <a:avLst/>
+          </a:prstGeom>
+          <a:noFill/>
+        </p:spPr>
+        <p:txBody>
+          <a:bodyPr wrap="square" lIns="45720" tIns="18288" rIns="45720" bIns="18288" anchor="t">
+            <a:spAutoFit/>
+          </a:bodyPr>
+          <a:lstStyle/>
+          <a:p>
+            <a:pPr algn="l">
+              <a:lnSpc>
+                <a:spcPct val="130000"/>
+              </a:lnSpc>
+            </a:pPr>
+            <a:r>
+              <a:rPr sz="1200" b="0">
+                <a:solidFill>
+                  <a:srgbClr val="475569"/>
+                </a:solidFill>
+                <a:latin typeface="Noto Sans KR"/>
+              </a:rPr>
+              <a:t>·  OWASP Top 10 for LLM 레드티밍 (공격 진단)
+·  입력값 필터링·가드레일 설치 (방어)</a:t>
+            </a:r>
+          </a:p>
+        </p:txBody>
+      </p:sp>
+      <p:sp>
+        <p:nvSpPr>
+          <p:cNvPr id="43" name="Rounded Rectangle 42"/>
+          <p:cNvSpPr/>
+          <p:nvPr/>
+        </p:nvSpPr>
+        <p:spPr>
+          <a:xfrm>
+            <a:off x="8182660" y="4562856"/>
+            <a:ext cx="3551834" cy="1947672"/>
+          </a:xfrm>
+          <a:prstGeom prst="roundRect">
+            <a:avLst>
+              <a:gd name="adj" fmla="val 3755"/>
+            </a:avLst>
+          </a:prstGeom>
+          <a:solidFill>
+            <a:srgbClr val="FFFFFF"/>
+          </a:solidFill>
+          <a:ln w="12700">
+            <a:solidFill>
+              <a:srgbClr val="E2E8F0"/>
+            </a:solidFill>
+          </a:ln>
+        </p:spPr>
+        <p:style>
+          <a:lnRef idx="1">
+            <a:schemeClr val="accent1"/>
+          </a:lnRef>
+          <a:fillRef idx="3">
+            <a:schemeClr val="accent1"/>
+          </a:fillRef>
+          <a:effectRef idx="2">
+            <a:schemeClr val="accent1"/>
+          </a:effectRef>
+          <a:fontRef idx="minor">
+            <a:schemeClr val="lt1"/>
+          </a:fontRef>
+        </p:style>
+        <p:txBody>
+          <a:bodyPr rtlCol="0" anchor="ctr"/>
+          <a:lstStyle/>
+          <a:p>
+            <a:endParaRPr/>
+          </a:p>
+        </p:txBody>
+      </p:sp>
+      <p:sp>
+        <p:nvSpPr>
+          <p:cNvPr id="44" name="Rectangle 43"/>
+          <p:cNvSpPr/>
+          <p:nvPr/>
+        </p:nvSpPr>
+        <p:spPr>
+          <a:xfrm>
+            <a:off x="8182660" y="4654296"/>
+            <a:ext cx="64008" cy="1764792"/>
+          </a:xfrm>
+          <a:prstGeom prst="rect">
+            <a:avLst/>
+          </a:prstGeom>
+          <a:solidFill>
+            <a:srgbClr val="059669"/>
+          </a:solidFill>
+          <a:ln>
+            <a:noFill/>
+          </a:ln>
+        </p:spPr>
+        <p:style>
+          <a:lnRef idx="1">
+            <a:schemeClr val="accent1"/>
+          </a:lnRef>
+          <a:fillRef idx="3">
+            <a:schemeClr val="accent1"/>
+          </a:fillRef>
+          <a:effectRef idx="2">
+            <a:schemeClr val="accent1"/>
+          </a:effectRef>
+          <a:fontRef idx="minor">
+            <a:schemeClr val="lt1"/>
+          </a:fontRef>
+        </p:style>
+        <p:txBody>
+          <a:bodyPr rtlCol="0" anchor="ctr"/>
+          <a:lstStyle/>
+          <a:p>
+            <a:endParaRPr/>
+          </a:p>
+        </p:txBody>
+      </p:sp>
+      <p:sp>
+        <p:nvSpPr>
+          <p:cNvPr id="45" name="TextBox 44"/>
+          <p:cNvSpPr txBox="1"/>
+          <p:nvPr/>
+        </p:nvSpPr>
+        <p:spPr>
+          <a:xfrm>
+            <a:off x="8420404" y="4654296"/>
+            <a:ext cx="3167786" cy="237744"/>
+          </a:xfrm>
+          <a:prstGeom prst="rect">
+            <a:avLst/>
+          </a:prstGeom>
+          <a:noFill/>
+        </p:spPr>
+        <p:txBody>
+          <a:bodyPr wrap="square" lIns="45720" tIns="18288" rIns="45720" bIns="18288" anchor="t">
+            <a:spAutoFit/>
+          </a:bodyPr>
+          <a:lstStyle/>
+          <a:p>
+            <a:pPr algn="l"/>
+            <a:r>
+              <a:rPr sz="1200" b="1">
+                <a:solidFill>
+                  <a:srgbClr val="059669"/>
+                </a:solidFill>
+                <a:latin typeface="Noto Sans KR"/>
+              </a:rPr>
+              <a:t>7과정</a:t>
+            </a:r>
+          </a:p>
+        </p:txBody>
+      </p:sp>
+      <p:sp>
+        <p:nvSpPr>
+          <p:cNvPr id="46" name="TextBox 45"/>
+          <p:cNvSpPr txBox="1"/>
+          <p:nvPr/>
+        </p:nvSpPr>
+        <p:spPr>
+          <a:xfrm>
+            <a:off x="8420404" y="4910328"/>
+            <a:ext cx="3167786" cy="428487"/>
+          </a:xfrm>
+          <a:prstGeom prst="rect">
+            <a:avLst/>
+          </a:prstGeom>
+          <a:noFill/>
+        </p:spPr>
+        <p:txBody>
+          <a:bodyPr wrap="square" lIns="45720" tIns="18288" rIns="45720" bIns="18288" anchor="t">
+            <a:spAutoFit/>
+          </a:bodyPr>
+          <a:lstStyle/>
+          <a:p>
+            <a:pPr algn="l">
+              <a:lnSpc>
+                <a:spcPct val="112000"/>
+              </a:lnSpc>
+            </a:pPr>
+            <a:r>
+              <a:rPr sz="1300" b="1">
+                <a:solidFill>
+                  <a:srgbClr val="1E293B"/>
+                </a:solidFill>
+                <a:latin typeface="Noto Sans KR"/>
+              </a:rPr>
+              <a:t>AI 침해대응 및 복구</a:t>
+            </a:r>
+          </a:p>
+        </p:txBody>
+      </p:sp>
+      <p:sp>
+        <p:nvSpPr>
+          <p:cNvPr id="47" name="TextBox 46"/>
+          <p:cNvSpPr txBox="1"/>
+          <p:nvPr/>
+        </p:nvSpPr>
+        <p:spPr>
+          <a:xfrm>
+            <a:off x="8420404" y="5384535"/>
+            <a:ext cx="3167786" cy="1016264"/>
+          </a:xfrm>
+          <a:prstGeom prst="rect">
+            <a:avLst/>
+          </a:prstGeom>
+          <a:noFill/>
+        </p:spPr>
+        <p:txBody>
+          <a:bodyPr wrap="square" lIns="45720" tIns="18288" rIns="45720" bIns="18288" anchor="t">
+            <a:spAutoFit/>
+          </a:bodyPr>
+          <a:lstStyle/>
+          <a:p>
+            <a:pPr algn="l">
+              <a:lnSpc>
+                <a:spcPct val="130000"/>
+              </a:lnSpc>
+            </a:pPr>
+            <a:r>
+              <a:rPr sz="1200" b="0">
+                <a:solidFill>
+                  <a:srgbClr val="475569"/>
+                </a:solidFill>
+                <a:latin typeface="Noto Sans KR"/>
+              </a:rPr>
+              <a:t>·  AI 변칙 로그 및 적대적 침해 탐지
+·  모델 포렌식 및 회복 실습</a:t>
+            </a:r>
+          </a:p>
+        </p:txBody>
+      </p:sp>
+      <p:sp>
+        <p:nvSpPr>
+          <p:cNvPr id="48" name="TextBox 47"/>
+          <p:cNvSpPr txBox="1"/>
+          <p:nvPr/>
+        </p:nvSpPr>
+        <p:spPr>
+          <a:xfrm>
+            <a:off x="11734495" y="6492240"/>
+            <a:ext cx="365760" cy="228600"/>
+          </a:xfrm>
+          <a:prstGeom prst="rect">
+            <a:avLst/>
+          </a:prstGeom>
+          <a:noFill/>
+        </p:spPr>
+        <p:txBody>
+          <a:bodyPr wrap="square" lIns="45720" tIns="18288" rIns="45720" bIns="18288" anchor="t">
+            <a:spAutoFit/>
+          </a:bodyPr>
+          <a:lstStyle/>
+          <a:p>
+            <a:pPr algn="r"/>
+            <a:r>
+              <a:rPr sz="900" b="0">
+                <a:solidFill>
+                  <a:srgbClr val="94A3B8"/>
+                </a:solidFill>
+                <a:latin typeface="Noto Sans KR"/>
+              </a:rPr>
+              <a:t>2</a:t>
+            </a:r>
+          </a:p>
+        </p:txBody>
+      </p:sp>
+    </p:spTree>
+  </p:cSld>
+  <p:clrMapOvr>
+    <a:masterClrMapping/>
+  </p:clrMapOvr>
+</p:sld>
+</file>
+
+<file path=ppt/slides/slide3.xml><?xml version="1.0" encoding="utf-8"?>
+<p:sld xmlns:a="http://schemas.openxmlformats.org/drawingml/2006/main" xmlns:r="http://schemas.openxmlformats.org/officeDocument/2006/relationships" xmlns:p="http://schemas.openxmlformats.org/presentationml/2006/main">
+  <p:cSld>
+    <p:bg>
+      <p:bgPr>
+        <a:solidFill>
+          <a:srgbClr val="F8FAFC"/>
+        </a:solidFill>
+        <a:effectLst/>
+      </p:bgPr>
+    </p:bg>
+    <p:spTree>
+      <p:nvGrpSpPr>
+        <p:cNvPr id="1" name=""/>
+        <p:cNvGrpSpPr/>
+        <p:nvPr/>
+      </p:nvGrpSpPr>
+      <p:grpSpPr>
+        <a:xfrm>
+          <a:off x="0" y="0"/>
+          <a:ext cx="0" cy="0"/>
+          <a:chOff x="0" y="0"/>
+          <a:chExt cx="0" cy="0"/>
+        </a:xfrm>
+      </p:grpSpPr>
+      <p:sp>
+        <p:nvSpPr>
+          <p:cNvPr id="2" name="TextBox 1"/>
+          <p:cNvSpPr txBox="1"/>
+          <p:nvPr/>
+        </p:nvSpPr>
+        <p:spPr>
+          <a:xfrm>
+            <a:off x="658368" y="512064"/>
+            <a:ext cx="10893247" cy="731520"/>
+          </a:xfrm>
+          <a:prstGeom prst="rect">
+            <a:avLst/>
+          </a:prstGeom>
+          <a:noFill/>
+        </p:spPr>
+        <p:txBody>
+          <a:bodyPr wrap="square" lIns="45720" tIns="18288" rIns="45720" bIns="18288" anchor="t">
+            <a:spAutoFit/>
+          </a:bodyPr>
+          <a:lstStyle/>
+          <a:p>
+            <a:pPr algn="l"/>
+            <a:r>
+              <a:rPr sz="2700" b="1">
+                <a:solidFill>
+                  <a:srgbClr val="1B2330"/>
+                </a:solidFill>
+                <a:latin typeface="Noto Sans KR"/>
+              </a:rPr>
+              <a:t>AI보안 교육 과정 로드맵 (단계별 경로)</a:t>
+            </a:r>
+          </a:p>
+        </p:txBody>
+      </p:sp>
+      <p:sp>
+        <p:nvSpPr>
+          <p:cNvPr id="3" name="TextBox 2"/>
+          <p:cNvSpPr txBox="1"/>
+          <p:nvPr/>
+        </p:nvSpPr>
+        <p:spPr>
+          <a:xfrm>
+            <a:off x="676656" y="1188720"/>
+            <a:ext cx="10820095" cy="365760"/>
+          </a:xfrm>
+          <a:prstGeom prst="rect">
+            <a:avLst/>
+          </a:prstGeom>
+          <a:noFill/>
+        </p:spPr>
+        <p:txBody>
+          <a:bodyPr wrap="square" lIns="45720" tIns="18288" rIns="45720" bIns="18288" anchor="t">
+            <a:spAutoFit/>
+          </a:bodyPr>
+          <a:lstStyle/>
+          <a:p>
+            <a:pPr algn="l"/>
+            <a:r>
+              <a:rPr sz="1300" b="0">
+                <a:solidFill>
+                  <a:srgbClr val="5B6470"/>
+                </a:solidFill>
+                <a:latin typeface="Noto Sans KR"/>
+              </a:rPr>
+              <a:t>초급 → 중급 → 고급 · 레벨 진행형 7개 과정</a:t>
+            </a:r>
+          </a:p>
+        </p:txBody>
+      </p:sp>
+      <p:sp>
+        <p:nvSpPr>
+          <p:cNvPr id="4" name="Rounded Rectangle 3"/>
+          <p:cNvSpPr/>
+          <p:nvPr/>
+        </p:nvSpPr>
+        <p:spPr>
+          <a:xfrm>
+            <a:off x="457200" y="1444752"/>
+            <a:ext cx="2331720" cy="1554480"/>
+          </a:xfrm>
+          <a:prstGeom prst="roundRect">
+            <a:avLst>
+              <a:gd name="adj" fmla="val 5882"/>
+            </a:avLst>
+          </a:prstGeom>
+          <a:solidFill>
+            <a:srgbClr val="1C75C9"/>
+          </a:solidFill>
+          <a:ln>
+            <a:noFill/>
+          </a:ln>
+        </p:spPr>
+        <p:style>
+          <a:lnRef idx="1">
+            <a:schemeClr val="accent1"/>
+          </a:lnRef>
+          <a:fillRef idx="3">
+            <a:schemeClr val="accent1"/>
+          </a:fillRef>
+          <a:effectRef idx="2">
+            <a:schemeClr val="accent1"/>
+          </a:effectRef>
+          <a:fontRef idx="minor">
+            <a:schemeClr val="lt1"/>
+          </a:fontRef>
+        </p:style>
+        <p:txBody>
+          <a:bodyPr rtlCol="0" anchor="ctr"/>
+          <a:lstStyle/>
+          <a:p>
+            <a:endParaRPr/>
+          </a:p>
+        </p:txBody>
+      </p:sp>
+      <p:sp>
+        <p:nvSpPr>
+          <p:cNvPr id="5" name="TextBox 4"/>
+          <p:cNvSpPr txBox="1"/>
+          <p:nvPr/>
+        </p:nvSpPr>
+        <p:spPr>
+          <a:xfrm>
+            <a:off x="640080" y="1609344"/>
+            <a:ext cx="1965960" cy="420624"/>
+          </a:xfrm>
+          <a:prstGeom prst="rect">
+            <a:avLst/>
+          </a:prstGeom>
+          <a:noFill/>
+        </p:spPr>
+        <p:txBody>
+          <a:bodyPr wrap="square" lIns="45720" tIns="18288" rIns="45720" bIns="18288" anchor="t">
+            <a:spAutoFit/>
+          </a:bodyPr>
+          <a:lstStyle/>
+          <a:p>
+            <a:pPr algn="l"/>
+            <a:r>
+              <a:rPr sz="1500" b="1">
+                <a:solidFill>
+                  <a:srgbClr val="FFFFFF"/>
+                </a:solidFill>
+                <a:latin typeface="Noto Sans KR"/>
+              </a:rPr>
+              <a:t>초급 (Beginner)</a:t>
+            </a:r>
+          </a:p>
+        </p:txBody>
+      </p:sp>
+      <p:sp>
+        <p:nvSpPr>
+          <p:cNvPr id="6" name="TextBox 5"/>
+          <p:cNvSpPr txBox="1"/>
+          <p:nvPr/>
+        </p:nvSpPr>
+        <p:spPr>
+          <a:xfrm>
+            <a:off x="640080" y="2103120"/>
+            <a:ext cx="1965960" cy="749808"/>
+          </a:xfrm>
+          <a:prstGeom prst="rect">
+            <a:avLst/>
+          </a:prstGeom>
+          <a:noFill/>
+        </p:spPr>
+        <p:txBody>
+          <a:bodyPr wrap="square" lIns="45720" tIns="18288" rIns="45720" bIns="18288" anchor="t">
+            <a:spAutoFit/>
+          </a:bodyPr>
+          <a:lstStyle/>
+          <a:p>
+            <a:pPr algn="l">
+              <a:lnSpc>
+                <a:spcPct val="118000"/>
+              </a:lnSpc>
+            </a:pPr>
+            <a:r>
+              <a:rPr sz="1250" b="1">
+                <a:solidFill>
+                  <a:srgbClr val="FFFFFF"/>
+                </a:solidFill>
+                <a:latin typeface="Noto Sans KR"/>
+              </a:rPr>
+              <a:t>AI 보안 기초 및 안전한 활용</a:t>
+            </a:r>
+          </a:p>
+        </p:txBody>
+      </p:sp>
+      <p:sp>
+        <p:nvSpPr>
+          <p:cNvPr id="7" name="Rounded Rectangle 6"/>
+          <p:cNvSpPr/>
+          <p:nvPr/>
+        </p:nvSpPr>
+        <p:spPr>
+          <a:xfrm>
+            <a:off x="3008376" y="1444752"/>
+            <a:ext cx="4280763" cy="1554480"/>
+          </a:xfrm>
+          <a:prstGeom prst="roundRect">
+            <a:avLst>
+              <a:gd name="adj" fmla="val 4705"/>
+            </a:avLst>
+          </a:prstGeom>
+          <a:solidFill>
+            <a:srgbClr val="FFFFFF"/>
+          </a:solidFill>
+          <a:ln w="12700">
+            <a:solidFill>
+              <a:srgbClr val="E2E8F0"/>
+            </a:solidFill>
+          </a:ln>
+        </p:spPr>
+        <p:style>
+          <a:lnRef idx="1">
+            <a:schemeClr val="accent1"/>
+          </a:lnRef>
+          <a:fillRef idx="3">
+            <a:schemeClr val="accent1"/>
+          </a:fillRef>
+          <a:effectRef idx="2">
+            <a:schemeClr val="accent1"/>
+          </a:effectRef>
+          <a:fontRef idx="minor">
+            <a:schemeClr val="lt1"/>
+          </a:fontRef>
+        </p:style>
+        <p:txBody>
+          <a:bodyPr rtlCol="0" anchor="ctr"/>
+          <a:lstStyle/>
+          <a:p>
+            <a:endParaRPr/>
+          </a:p>
+        </p:txBody>
+      </p:sp>
+      <p:sp>
+        <p:nvSpPr>
+          <p:cNvPr id="8" name="Rectangle 7"/>
+          <p:cNvSpPr/>
+          <p:nvPr/>
+        </p:nvSpPr>
+        <p:spPr>
+          <a:xfrm>
+            <a:off x="3008376" y="1536192"/>
+            <a:ext cx="64008" cy="1371600"/>
+          </a:xfrm>
+          <a:prstGeom prst="rect">
+            <a:avLst/>
+          </a:prstGeom>
+          <a:solidFill>
+            <a:srgbClr val="1C75C9"/>
+          </a:solidFill>
+          <a:ln>
+            <a:noFill/>
+          </a:ln>
+        </p:spPr>
+        <p:style>
+          <a:lnRef idx="1">
+            <a:schemeClr val="accent1"/>
+          </a:lnRef>
+          <a:fillRef idx="3">
+            <a:schemeClr val="accent1"/>
+          </a:fillRef>
+          <a:effectRef idx="2">
+            <a:schemeClr val="accent1"/>
+          </a:effectRef>
+          <a:fontRef idx="minor">
+            <a:schemeClr val="lt1"/>
+          </a:fontRef>
+        </p:style>
+        <p:txBody>
+          <a:bodyPr rtlCol="0" anchor="ctr"/>
+          <a:lstStyle/>
+          <a:p>
+            <a:endParaRPr/>
+          </a:p>
+        </p:txBody>
+      </p:sp>
+      <p:sp>
+        <p:nvSpPr>
+          <p:cNvPr id="9" name="TextBox 8"/>
+          <p:cNvSpPr txBox="1"/>
+          <p:nvPr/>
+        </p:nvSpPr>
+        <p:spPr>
+          <a:xfrm>
+            <a:off x="3246120" y="1572768"/>
+            <a:ext cx="3878427" cy="237744"/>
+          </a:xfrm>
+          <a:prstGeom prst="rect">
+            <a:avLst/>
+          </a:prstGeom>
+          <a:noFill/>
+        </p:spPr>
+        <p:txBody>
+          <a:bodyPr wrap="square" lIns="45720" tIns="18288" rIns="45720" bIns="18288" anchor="t">
+            <a:spAutoFit/>
+          </a:bodyPr>
+          <a:lstStyle/>
+          <a:p>
+            <a:pPr algn="l"/>
+            <a:r>
+              <a:rPr sz="1200" b="1">
+                <a:solidFill>
+                  <a:srgbClr val="1C75C9"/>
+                </a:solidFill>
+                <a:latin typeface="Noto Sans KR"/>
+              </a:rPr>
+              <a:t>1과정</a:t>
+            </a:r>
+          </a:p>
+        </p:txBody>
+      </p:sp>
+      <p:sp>
+        <p:nvSpPr>
+          <p:cNvPr id="10" name="TextBox 9"/>
+          <p:cNvSpPr txBox="1"/>
+          <p:nvPr/>
+        </p:nvSpPr>
+        <p:spPr>
+          <a:xfrm>
+            <a:off x="3246120" y="1828800"/>
+            <a:ext cx="3878427" cy="365760"/>
+          </a:xfrm>
+          <a:prstGeom prst="rect">
+            <a:avLst/>
+          </a:prstGeom>
+          <a:noFill/>
+        </p:spPr>
+        <p:txBody>
+          <a:bodyPr wrap="square" lIns="45720" tIns="18288" rIns="45720" bIns="18288" anchor="t">
+            <a:spAutoFit/>
+          </a:bodyPr>
+          <a:lstStyle/>
+          <a:p>
+            <a:pPr algn="l">
+              <a:lnSpc>
+                <a:spcPct val="112000"/>
+              </a:lnSpc>
+            </a:pPr>
+            <a:r>
+              <a:rPr sz="1300" b="1">
+                <a:solidFill>
+                  <a:srgbClr val="1E293B"/>
+                </a:solidFill>
+                <a:latin typeface="Noto Sans KR"/>
+              </a:rPr>
+              <a:t>AI 보안의 이해</a:t>
+            </a:r>
+          </a:p>
+        </p:txBody>
+      </p:sp>
+      <p:sp>
+        <p:nvSpPr>
+          <p:cNvPr id="11" name="TextBox 10"/>
+          <p:cNvSpPr txBox="1"/>
+          <p:nvPr/>
+        </p:nvSpPr>
+        <p:spPr>
+          <a:xfrm>
+            <a:off x="3246120" y="2231136"/>
+            <a:ext cx="3878427" cy="658368"/>
+          </a:xfrm>
+          <a:prstGeom prst="rect">
+            <a:avLst/>
+          </a:prstGeom>
+          <a:noFill/>
+        </p:spPr>
+        <p:txBody>
+          <a:bodyPr wrap="square" lIns="45720" tIns="18288" rIns="45720" bIns="18288" anchor="t">
+            <a:spAutoFit/>
+          </a:bodyPr>
+          <a:lstStyle/>
+          <a:p>
+            <a:pPr algn="l">
+              <a:lnSpc>
+                <a:spcPct val="130000"/>
+              </a:lnSpc>
+            </a:pPr>
+            <a:r>
+              <a:rPr sz="1200" b="0">
+                <a:solidFill>
+                  <a:srgbClr val="475569"/>
+                </a:solidFill>
+                <a:latin typeface="Noto Sans KR"/>
+              </a:rPr>
+              <a:t>·  AI 기본 원리 및 위협 모델링
+·  프롬프트 인젝션 위협 요소 분석</a:t>
+            </a:r>
+          </a:p>
+        </p:txBody>
+      </p:sp>
+      <p:sp>
+        <p:nvSpPr>
+          <p:cNvPr id="12" name="Rounded Rectangle 11"/>
+          <p:cNvSpPr/>
+          <p:nvPr/>
+        </p:nvSpPr>
+        <p:spPr>
+          <a:xfrm>
+            <a:off x="7453731" y="1444752"/>
+            <a:ext cx="4280763" cy="1554480"/>
+          </a:xfrm>
+          <a:prstGeom prst="roundRect">
+            <a:avLst>
+              <a:gd name="adj" fmla="val 4705"/>
+            </a:avLst>
+          </a:prstGeom>
+          <a:solidFill>
+            <a:srgbClr val="FFFFFF"/>
+          </a:solidFill>
+          <a:ln w="12700">
+            <a:solidFill>
+              <a:srgbClr val="E2E8F0"/>
+            </a:solidFill>
+          </a:ln>
+        </p:spPr>
+        <p:style>
+          <a:lnRef idx="1">
+            <a:schemeClr val="accent1"/>
+          </a:lnRef>
+          <a:fillRef idx="3">
+            <a:schemeClr val="accent1"/>
+          </a:fillRef>
+          <a:effectRef idx="2">
+            <a:schemeClr val="accent1"/>
+          </a:effectRef>
+          <a:fontRef idx="minor">
+            <a:schemeClr val="lt1"/>
+          </a:fontRef>
+        </p:style>
+        <p:txBody>
+          <a:bodyPr rtlCol="0" anchor="ctr"/>
+          <a:lstStyle/>
+          <a:p>
+            <a:endParaRPr/>
+          </a:p>
+        </p:txBody>
+      </p:sp>
+      <p:sp>
+        <p:nvSpPr>
+          <p:cNvPr id="13" name="Rectangle 12"/>
+          <p:cNvSpPr/>
+          <p:nvPr/>
+        </p:nvSpPr>
+        <p:spPr>
+          <a:xfrm>
+            <a:off x="7453731" y="1536192"/>
+            <a:ext cx="64008" cy="1371600"/>
+          </a:xfrm>
+          <a:prstGeom prst="rect">
+            <a:avLst/>
+          </a:prstGeom>
+          <a:solidFill>
+            <a:srgbClr val="1C75C9"/>
+          </a:solidFill>
+          <a:ln>
+            <a:noFill/>
+          </a:ln>
+        </p:spPr>
+        <p:style>
+          <a:lnRef idx="1">
+            <a:schemeClr val="accent1"/>
+          </a:lnRef>
+          <a:fillRef idx="3">
+            <a:schemeClr val="accent1"/>
+          </a:fillRef>
+          <a:effectRef idx="2">
+            <a:schemeClr val="accent1"/>
+          </a:effectRef>
+          <a:fontRef idx="minor">
+            <a:schemeClr val="lt1"/>
+          </a:fontRef>
+        </p:style>
+        <p:txBody>
+          <a:bodyPr rtlCol="0" anchor="ctr"/>
+          <a:lstStyle/>
+          <a:p>
+            <a:endParaRPr/>
+          </a:p>
+        </p:txBody>
+      </p:sp>
+      <p:sp>
+        <p:nvSpPr>
+          <p:cNvPr id="14" name="TextBox 13"/>
+          <p:cNvSpPr txBox="1"/>
+          <p:nvPr/>
+        </p:nvSpPr>
+        <p:spPr>
+          <a:xfrm>
+            <a:off x="7691475" y="1572768"/>
+            <a:ext cx="3878427" cy="237744"/>
+          </a:xfrm>
+          <a:prstGeom prst="rect">
+            <a:avLst/>
+          </a:prstGeom>
+          <a:noFill/>
+        </p:spPr>
+        <p:txBody>
+          <a:bodyPr wrap="square" lIns="45720" tIns="18288" rIns="45720" bIns="18288" anchor="t">
+            <a:spAutoFit/>
+          </a:bodyPr>
+          <a:lstStyle/>
+          <a:p>
+            <a:pPr algn="l"/>
+            <a:r>
+              <a:rPr sz="1200" b="1">
+                <a:solidFill>
+                  <a:srgbClr val="1C75C9"/>
+                </a:solidFill>
+                <a:latin typeface="Noto Sans KR"/>
+              </a:rPr>
+              <a:t>2과정</a:t>
+            </a:r>
+          </a:p>
+        </p:txBody>
+      </p:sp>
+      <p:sp>
+        <p:nvSpPr>
+          <p:cNvPr id="15" name="TextBox 14"/>
+          <p:cNvSpPr txBox="1"/>
+          <p:nvPr/>
+        </p:nvSpPr>
+        <p:spPr>
+          <a:xfrm>
+            <a:off x="7691475" y="1828800"/>
+            <a:ext cx="3878427" cy="365760"/>
+          </a:xfrm>
+          <a:prstGeom prst="rect">
+            <a:avLst/>
+          </a:prstGeom>
+          <a:noFill/>
+        </p:spPr>
+        <p:txBody>
+          <a:bodyPr wrap="square" lIns="45720" tIns="18288" rIns="45720" bIns="18288" anchor="t">
+            <a:spAutoFit/>
+          </a:bodyPr>
+          <a:lstStyle/>
+          <a:p>
+            <a:pPr algn="l">
+              <a:lnSpc>
+                <a:spcPct val="112000"/>
+              </a:lnSpc>
+            </a:pPr>
+            <a:r>
+              <a:rPr sz="1300" b="1">
+                <a:solidFill>
+                  <a:srgbClr val="1E293B"/>
+                </a:solidFill>
+                <a:latin typeface="Noto Sans KR"/>
+              </a:rPr>
+              <a:t>AI 보안 업무 자동화 및 활용</a:t>
+            </a:r>
+          </a:p>
+        </p:txBody>
+      </p:sp>
+      <p:sp>
+        <p:nvSpPr>
+          <p:cNvPr id="16" name="TextBox 15"/>
+          <p:cNvSpPr txBox="1"/>
+          <p:nvPr/>
+        </p:nvSpPr>
+        <p:spPr>
+          <a:xfrm>
+            <a:off x="7691475" y="2231136"/>
+            <a:ext cx="3878427" cy="658368"/>
+          </a:xfrm>
+          <a:prstGeom prst="rect">
+            <a:avLst/>
+          </a:prstGeom>
+          <a:noFill/>
+        </p:spPr>
+        <p:txBody>
+          <a:bodyPr wrap="square" lIns="45720" tIns="18288" rIns="45720" bIns="18288" anchor="t">
+            <a:spAutoFit/>
+          </a:bodyPr>
+          <a:lstStyle/>
+          <a:p>
+            <a:pPr algn="l">
+              <a:lnSpc>
+                <a:spcPct val="130000"/>
+              </a:lnSpc>
+            </a:pPr>
+            <a:r>
+              <a:rPr sz="1200" b="0">
+                <a:solidFill>
+                  <a:srgbClr val="475569"/>
+                </a:solidFill>
+                <a:latin typeface="Noto Sans KR"/>
+              </a:rPr>
+              <a:t>·  생성형 AI 기반 보안업무 자동화 기초
+·  민감 정보 유출 방지 및 안전한 개발환경 구축</a:t>
+            </a:r>
+          </a:p>
+        </p:txBody>
+      </p:sp>
+      <p:sp>
+        <p:nvSpPr>
+          <p:cNvPr id="17" name="Rounded Rectangle 16"/>
+          <p:cNvSpPr/>
+          <p:nvPr/>
+        </p:nvSpPr>
+        <p:spPr>
+          <a:xfrm>
+            <a:off x="457200" y="3200400"/>
+            <a:ext cx="2331720" cy="1554480"/>
+          </a:xfrm>
+          <a:prstGeom prst="roundRect">
+            <a:avLst>
+              <a:gd name="adj" fmla="val 5882"/>
+            </a:avLst>
+          </a:prstGeom>
+          <a:solidFill>
+            <a:srgbClr val="13AAED"/>
+          </a:solidFill>
+          <a:ln>
+            <a:noFill/>
+          </a:ln>
+        </p:spPr>
+        <p:style>
+          <a:lnRef idx="1">
+            <a:schemeClr val="accent1"/>
+          </a:lnRef>
+          <a:fillRef idx="3">
+            <a:schemeClr val="accent1"/>
+          </a:fillRef>
+          <a:effectRef idx="2">
+            <a:schemeClr val="accent1"/>
+          </a:effectRef>
+          <a:fontRef idx="minor">
+            <a:schemeClr val="lt1"/>
+          </a:fontRef>
+        </p:style>
+        <p:txBody>
+          <a:bodyPr rtlCol="0" anchor="ctr"/>
+          <a:lstStyle/>
+          <a:p>
+            <a:endParaRPr/>
+          </a:p>
+        </p:txBody>
+      </p:sp>
+      <p:sp>
+        <p:nvSpPr>
+          <p:cNvPr id="18" name="TextBox 17"/>
+          <p:cNvSpPr txBox="1"/>
+          <p:nvPr/>
+        </p:nvSpPr>
+        <p:spPr>
+          <a:xfrm>
+            <a:off x="640080" y="3364992"/>
+            <a:ext cx="1965960" cy="420624"/>
+          </a:xfrm>
+          <a:prstGeom prst="rect">
+            <a:avLst/>
+          </a:prstGeom>
+          <a:noFill/>
+        </p:spPr>
+        <p:txBody>
+          <a:bodyPr wrap="square" lIns="45720" tIns="18288" rIns="45720" bIns="18288" anchor="t">
+            <a:spAutoFit/>
+          </a:bodyPr>
+          <a:lstStyle/>
+          <a:p>
+            <a:pPr algn="l"/>
+            <a:r>
+              <a:rPr sz="1400" b="1">
+                <a:solidFill>
+                  <a:srgbClr val="FFFFFF"/>
+                </a:solidFill>
+                <a:latin typeface="Noto Sans KR"/>
+              </a:rPr>
+              <a:t>중급 (Intermediate)</a:t>
+            </a:r>
+          </a:p>
+        </p:txBody>
+      </p:sp>
+      <p:sp>
+        <p:nvSpPr>
+          <p:cNvPr id="19" name="TextBox 18"/>
+          <p:cNvSpPr txBox="1"/>
+          <p:nvPr/>
+        </p:nvSpPr>
+        <p:spPr>
+          <a:xfrm>
+            <a:off x="640080" y="3858768"/>
+            <a:ext cx="1965960" cy="749808"/>
+          </a:xfrm>
+          <a:prstGeom prst="rect">
+            <a:avLst/>
+          </a:prstGeom>
+          <a:noFill/>
+        </p:spPr>
+        <p:txBody>
+          <a:bodyPr wrap="square" lIns="45720" tIns="18288" rIns="45720" bIns="18288" anchor="t">
+            <a:spAutoFit/>
+          </a:bodyPr>
+          <a:lstStyle/>
+          <a:p>
+            <a:pPr algn="l">
+              <a:lnSpc>
+                <a:spcPct val="118000"/>
+              </a:lnSpc>
+            </a:pPr>
+            <a:r>
+              <a:rPr sz="1250" b="1">
+                <a:solidFill>
+                  <a:srgbClr val="FFFFFF"/>
+                </a:solidFill>
+                <a:latin typeface="Noto Sans KR"/>
+              </a:rPr>
+              <a:t>AI 인프라 구축 및 지능형 보안</a:t>
+            </a:r>
+          </a:p>
+        </p:txBody>
+      </p:sp>
+      <p:sp>
+        <p:nvSpPr>
+          <p:cNvPr id="20" name="Rounded Rectangle 19"/>
+          <p:cNvSpPr/>
+          <p:nvPr/>
+        </p:nvSpPr>
+        <p:spPr>
+          <a:xfrm>
+            <a:off x="3008376" y="3200400"/>
+            <a:ext cx="2798978" cy="1554480"/>
+          </a:xfrm>
+          <a:prstGeom prst="roundRect">
+            <a:avLst>
+              <a:gd name="adj" fmla="val 4705"/>
+            </a:avLst>
+          </a:prstGeom>
+          <a:solidFill>
+            <a:srgbClr val="FFFFFF"/>
+          </a:solidFill>
+          <a:ln w="12700">
+            <a:solidFill>
+              <a:srgbClr val="E2E8F0"/>
+            </a:solidFill>
+          </a:ln>
+        </p:spPr>
+        <p:style>
+          <a:lnRef idx="1">
+            <a:schemeClr val="accent1"/>
+          </a:lnRef>
+          <a:fillRef idx="3">
+            <a:schemeClr val="accent1"/>
+          </a:fillRef>
+          <a:effectRef idx="2">
+            <a:schemeClr val="accent1"/>
+          </a:effectRef>
+          <a:fontRef idx="minor">
+            <a:schemeClr val="lt1"/>
+          </a:fontRef>
+        </p:style>
+        <p:txBody>
+          <a:bodyPr rtlCol="0" anchor="ctr"/>
+          <a:lstStyle/>
+          <a:p>
+            <a:endParaRPr/>
+          </a:p>
+        </p:txBody>
+      </p:sp>
+      <p:sp>
+        <p:nvSpPr>
+          <p:cNvPr id="21" name="Rectangle 20"/>
+          <p:cNvSpPr/>
+          <p:nvPr/>
+        </p:nvSpPr>
+        <p:spPr>
+          <a:xfrm>
+            <a:off x="3008376" y="3291840"/>
+            <a:ext cx="64008" cy="1371600"/>
+          </a:xfrm>
+          <a:prstGeom prst="rect">
+            <a:avLst/>
+          </a:prstGeom>
+          <a:solidFill>
+            <a:srgbClr val="13AAED"/>
+          </a:solidFill>
+          <a:ln>
+            <a:noFill/>
+          </a:ln>
+        </p:spPr>
+        <p:style>
+          <a:lnRef idx="1">
+            <a:schemeClr val="accent1"/>
+          </a:lnRef>
+          <a:fillRef idx="3">
+            <a:schemeClr val="accent1"/>
+          </a:fillRef>
+          <a:effectRef idx="2">
+            <a:schemeClr val="accent1"/>
+          </a:effectRef>
+          <a:fontRef idx="minor">
+            <a:schemeClr val="lt1"/>
+          </a:fontRef>
+        </p:style>
+        <p:txBody>
+          <a:bodyPr rtlCol="0" anchor="ctr"/>
+          <a:lstStyle/>
+          <a:p>
+            <a:endParaRPr/>
+          </a:p>
+        </p:txBody>
+      </p:sp>
+      <p:sp>
+        <p:nvSpPr>
+          <p:cNvPr id="22" name="TextBox 21"/>
+          <p:cNvSpPr txBox="1"/>
+          <p:nvPr/>
+        </p:nvSpPr>
+        <p:spPr>
+          <a:xfrm>
+            <a:off x="3246120" y="3328416"/>
+            <a:ext cx="2396642" cy="237744"/>
+          </a:xfrm>
+          <a:prstGeom prst="rect">
+            <a:avLst/>
+          </a:prstGeom>
+          <a:noFill/>
+        </p:spPr>
+        <p:txBody>
+          <a:bodyPr wrap="square" lIns="45720" tIns="18288" rIns="45720" bIns="18288" anchor="t">
+            <a:spAutoFit/>
+          </a:bodyPr>
+          <a:lstStyle/>
+          <a:p>
+            <a:pPr algn="l"/>
+            <a:r>
+              <a:rPr sz="1200" b="1">
+                <a:solidFill>
+                  <a:srgbClr val="13AAED"/>
+                </a:solidFill>
+                <a:latin typeface="Noto Sans KR"/>
+              </a:rPr>
+              <a:t>3과정</a:t>
+            </a:r>
+          </a:p>
+        </p:txBody>
+      </p:sp>
+      <p:sp>
+        <p:nvSpPr>
+          <p:cNvPr id="23" name="TextBox 22"/>
+          <p:cNvSpPr txBox="1"/>
+          <p:nvPr/>
+        </p:nvSpPr>
+        <p:spPr>
+          <a:xfrm>
+            <a:off x="3246120" y="3584448"/>
+            <a:ext cx="2396642" cy="365760"/>
+          </a:xfrm>
+          <a:prstGeom prst="rect">
+            <a:avLst/>
+          </a:prstGeom>
+          <a:noFill/>
+        </p:spPr>
+        <p:txBody>
+          <a:bodyPr wrap="square" lIns="45720" tIns="18288" rIns="45720" bIns="18288" anchor="t">
+            <a:spAutoFit/>
+          </a:bodyPr>
+          <a:lstStyle/>
+          <a:p>
+            <a:pPr algn="l">
+              <a:lnSpc>
+                <a:spcPct val="112000"/>
+              </a:lnSpc>
+            </a:pPr>
+            <a:r>
+              <a:rPr sz="1300" b="1">
+                <a:solidFill>
+                  <a:srgbClr val="1E293B"/>
+                </a:solidFill>
+                <a:latin typeface="Noto Sans KR"/>
+              </a:rPr>
+              <a:t>안전한 로컬 LLM 구축</a:t>
+            </a:r>
+          </a:p>
+        </p:txBody>
+      </p:sp>
+      <p:sp>
+        <p:nvSpPr>
+          <p:cNvPr id="24" name="TextBox 23"/>
+          <p:cNvSpPr txBox="1"/>
+          <p:nvPr/>
+        </p:nvSpPr>
+        <p:spPr>
+          <a:xfrm>
+            <a:off x="3246120" y="3986784"/>
+            <a:ext cx="2396642" cy="658367"/>
+          </a:xfrm>
+          <a:prstGeom prst="rect">
+            <a:avLst/>
+          </a:prstGeom>
+          <a:noFill/>
+        </p:spPr>
+        <p:txBody>
+          <a:bodyPr wrap="square" lIns="45720" tIns="18288" rIns="45720" bIns="18288" anchor="t">
+            <a:spAutoFit/>
+          </a:bodyPr>
+          <a:lstStyle/>
+          <a:p>
+            <a:pPr algn="l">
+              <a:lnSpc>
+                <a:spcPct val="130000"/>
+              </a:lnSpc>
+            </a:pPr>
+            <a:r>
+              <a:rPr sz="1000" b="0">
+                <a:solidFill>
+                  <a:srgbClr val="475569"/>
+                </a:solidFill>
+                <a:latin typeface="Noto Sans KR"/>
+              </a:rPr>
+              <a:t>·  온프레미스 sLLM 독립망 구축
+·  RAG 파이프라인 연계 및 파인튜닝</a:t>
+            </a:r>
+          </a:p>
+        </p:txBody>
+      </p:sp>
+      <p:sp>
+        <p:nvSpPr>
+          <p:cNvPr id="25" name="Rounded Rectangle 24"/>
+          <p:cNvSpPr/>
+          <p:nvPr/>
+        </p:nvSpPr>
+        <p:spPr>
+          <a:xfrm>
+            <a:off x="5971946" y="3200400"/>
+            <a:ext cx="2798978" cy="1554480"/>
+          </a:xfrm>
+          <a:prstGeom prst="roundRect">
+            <a:avLst>
+              <a:gd name="adj" fmla="val 4705"/>
+            </a:avLst>
+          </a:prstGeom>
+          <a:solidFill>
+            <a:srgbClr val="FFFFFF"/>
+          </a:solidFill>
+          <a:ln w="12700">
+            <a:solidFill>
+              <a:srgbClr val="E2E8F0"/>
+            </a:solidFill>
+          </a:ln>
+        </p:spPr>
+        <p:style>
+          <a:lnRef idx="1">
+            <a:schemeClr val="accent1"/>
+          </a:lnRef>
+          <a:fillRef idx="3">
+            <a:schemeClr val="accent1"/>
+          </a:fillRef>
+          <a:effectRef idx="2">
+            <a:schemeClr val="accent1"/>
+          </a:effectRef>
+          <a:fontRef idx="minor">
+            <a:schemeClr val="lt1"/>
+          </a:fontRef>
+        </p:style>
+        <p:txBody>
+          <a:bodyPr rtlCol="0" anchor="ctr"/>
+          <a:lstStyle/>
+          <a:p>
+            <a:endParaRPr/>
+          </a:p>
+        </p:txBody>
+      </p:sp>
+      <p:sp>
+        <p:nvSpPr>
+          <p:cNvPr id="26" name="Rectangle 25"/>
+          <p:cNvSpPr/>
+          <p:nvPr/>
+        </p:nvSpPr>
+        <p:spPr>
+          <a:xfrm>
+            <a:off x="5971946" y="3291840"/>
+            <a:ext cx="64008" cy="1371600"/>
+          </a:xfrm>
+          <a:prstGeom prst="rect">
+            <a:avLst/>
+          </a:prstGeom>
+          <a:solidFill>
+            <a:srgbClr val="13AAED"/>
+          </a:solidFill>
+          <a:ln>
+            <a:noFill/>
+          </a:ln>
+        </p:spPr>
+        <p:style>
+          <a:lnRef idx="1">
+            <a:schemeClr val="accent1"/>
+          </a:lnRef>
+          <a:fillRef idx="3">
+            <a:schemeClr val="accent1"/>
+          </a:fillRef>
+          <a:effectRef idx="2">
+            <a:schemeClr val="accent1"/>
+          </a:effectRef>
+          <a:fontRef idx="minor">
+            <a:schemeClr val="lt1"/>
+          </a:fontRef>
+        </p:style>
+        <p:txBody>
+          <a:bodyPr rtlCol="0" anchor="ctr"/>
+          <a:lstStyle/>
+          <a:p>
+            <a:endParaRPr/>
+          </a:p>
+        </p:txBody>
+      </p:sp>
+      <p:sp>
+        <p:nvSpPr>
+          <p:cNvPr id="27" name="TextBox 26"/>
+          <p:cNvSpPr txBox="1"/>
+          <p:nvPr/>
+        </p:nvSpPr>
+        <p:spPr>
+          <a:xfrm>
+            <a:off x="6209690" y="3328416"/>
+            <a:ext cx="2396642" cy="237744"/>
+          </a:xfrm>
+          <a:prstGeom prst="rect">
+            <a:avLst/>
+          </a:prstGeom>
+          <a:noFill/>
+        </p:spPr>
+        <p:txBody>
+          <a:bodyPr wrap="square" lIns="45720" tIns="18288" rIns="45720" bIns="18288" anchor="t">
+            <a:spAutoFit/>
+          </a:bodyPr>
+          <a:lstStyle/>
+          <a:p>
+            <a:pPr algn="l"/>
+            <a:r>
+              <a:rPr sz="1200" b="1">
+                <a:solidFill>
+                  <a:srgbClr val="13AAED"/>
+                </a:solidFill>
+                <a:latin typeface="Noto Sans KR"/>
+              </a:rPr>
+              <a:t>4과정</a:t>
+            </a:r>
+          </a:p>
+        </p:txBody>
+      </p:sp>
+      <p:sp>
+        <p:nvSpPr>
+          <p:cNvPr id="28" name="TextBox 27"/>
+          <p:cNvSpPr txBox="1"/>
+          <p:nvPr/>
+        </p:nvSpPr>
+        <p:spPr>
+          <a:xfrm>
+            <a:off x="6209690" y="3584448"/>
+            <a:ext cx="2396642" cy="365760"/>
+          </a:xfrm>
+          <a:prstGeom prst="rect">
+            <a:avLst/>
+          </a:prstGeom>
+          <a:noFill/>
+        </p:spPr>
+        <p:txBody>
+          <a:bodyPr wrap="square" lIns="45720" tIns="18288" rIns="45720" bIns="18288" anchor="t">
+            <a:spAutoFit/>
+          </a:bodyPr>
+          <a:lstStyle/>
+          <a:p>
+            <a:pPr algn="l">
+              <a:lnSpc>
+                <a:spcPct val="112000"/>
+              </a:lnSpc>
+            </a:pPr>
+            <a:r>
+              <a:rPr sz="1300" b="1">
+                <a:solidFill>
+                  <a:srgbClr val="1E293B"/>
+                </a:solidFill>
+                <a:latin typeface="Noto Sans KR"/>
+              </a:rPr>
+              <a:t>로컬 LLM 활용 사이버 보안</a:t>
+            </a:r>
+          </a:p>
+        </p:txBody>
+      </p:sp>
+      <p:sp>
+        <p:nvSpPr>
+          <p:cNvPr id="29" name="TextBox 28"/>
+          <p:cNvSpPr txBox="1"/>
+          <p:nvPr/>
+        </p:nvSpPr>
+        <p:spPr>
+          <a:xfrm>
+            <a:off x="6209690" y="3986784"/>
+            <a:ext cx="2396642" cy="658367"/>
+          </a:xfrm>
+          <a:prstGeom prst="rect">
+            <a:avLst/>
+          </a:prstGeom>
+          <a:noFill/>
+        </p:spPr>
+        <p:txBody>
+          <a:bodyPr wrap="square" lIns="45720" tIns="18288" rIns="45720" bIns="18288" anchor="t">
+            <a:spAutoFit/>
+          </a:bodyPr>
+          <a:lstStyle/>
+          <a:p>
+            <a:pPr algn="l">
+              <a:lnSpc>
+                <a:spcPct val="130000"/>
+              </a:lnSpc>
+            </a:pPr>
+            <a:r>
+              <a:rPr sz="1000" b="0">
+                <a:solidFill>
+                  <a:srgbClr val="475569"/>
+                </a:solidFill>
+                <a:latin typeface="Noto Sans KR"/>
+              </a:rPr>
+              <a:t>·  ML 기반 악성코드 및 변칙 분석
+·  SOAR/CTI 연계 통합 관제</a:t>
+            </a:r>
+          </a:p>
+        </p:txBody>
+      </p:sp>
+      <p:sp>
+        <p:nvSpPr>
+          <p:cNvPr id="30" name="Rounded Rectangle 29"/>
+          <p:cNvSpPr/>
+          <p:nvPr/>
+        </p:nvSpPr>
+        <p:spPr>
+          <a:xfrm>
+            <a:off x="8935516" y="3200400"/>
+            <a:ext cx="2798978" cy="1554480"/>
+          </a:xfrm>
+          <a:prstGeom prst="roundRect">
+            <a:avLst>
+              <a:gd name="adj" fmla="val 4705"/>
+            </a:avLst>
+          </a:prstGeom>
+          <a:solidFill>
+            <a:srgbClr val="FFFFFF"/>
+          </a:solidFill>
+          <a:ln w="12700">
+            <a:solidFill>
+              <a:srgbClr val="E2E8F0"/>
+            </a:solidFill>
+          </a:ln>
+        </p:spPr>
+        <p:style>
+          <a:lnRef idx="1">
+            <a:schemeClr val="accent1"/>
+          </a:lnRef>
+          <a:fillRef idx="3">
+            <a:schemeClr val="accent1"/>
+          </a:fillRef>
+          <a:effectRef idx="2">
+            <a:schemeClr val="accent1"/>
+          </a:effectRef>
+          <a:fontRef idx="minor">
+            <a:schemeClr val="lt1"/>
+          </a:fontRef>
+        </p:style>
+        <p:txBody>
+          <a:bodyPr rtlCol="0" anchor="ctr"/>
+          <a:lstStyle/>
+          <a:p>
+            <a:endParaRPr/>
+          </a:p>
+        </p:txBody>
+      </p:sp>
+      <p:sp>
+        <p:nvSpPr>
+          <p:cNvPr id="31" name="Rectangle 30"/>
+          <p:cNvSpPr/>
+          <p:nvPr/>
+        </p:nvSpPr>
+        <p:spPr>
+          <a:xfrm>
+            <a:off x="8935516" y="3291840"/>
+            <a:ext cx="64008" cy="1371600"/>
+          </a:xfrm>
+          <a:prstGeom prst="rect">
+            <a:avLst/>
+          </a:prstGeom>
+          <a:solidFill>
+            <a:srgbClr val="13AAED"/>
+          </a:solidFill>
+          <a:ln>
+            <a:noFill/>
+          </a:ln>
+        </p:spPr>
+        <p:style>
+          <a:lnRef idx="1">
+            <a:schemeClr val="accent1"/>
+          </a:lnRef>
+          <a:fillRef idx="3">
+            <a:schemeClr val="accent1"/>
+          </a:fillRef>
+          <a:effectRef idx="2">
+            <a:schemeClr val="accent1"/>
+          </a:effectRef>
+          <a:fontRef idx="minor">
+            <a:schemeClr val="lt1"/>
+          </a:fontRef>
+        </p:style>
+        <p:txBody>
+          <a:bodyPr rtlCol="0" anchor="ctr"/>
+          <a:lstStyle/>
+          <a:p>
+            <a:endParaRPr/>
+          </a:p>
+        </p:txBody>
+      </p:sp>
+      <p:sp>
+        <p:nvSpPr>
+          <p:cNvPr id="32" name="TextBox 31"/>
+          <p:cNvSpPr txBox="1"/>
+          <p:nvPr/>
+        </p:nvSpPr>
+        <p:spPr>
+          <a:xfrm>
+            <a:off x="9173260" y="3328416"/>
+            <a:ext cx="2396642" cy="237744"/>
+          </a:xfrm>
+          <a:prstGeom prst="rect">
+            <a:avLst/>
+          </a:prstGeom>
+          <a:noFill/>
+        </p:spPr>
+        <p:txBody>
+          <a:bodyPr wrap="square" lIns="45720" tIns="18288" rIns="45720" bIns="18288" anchor="t">
+            <a:spAutoFit/>
+          </a:bodyPr>
+          <a:lstStyle/>
+          <a:p>
+            <a:pPr algn="l"/>
+            <a:r>
+              <a:rPr sz="1200" b="1">
+                <a:solidFill>
+                  <a:srgbClr val="13AAED"/>
+                </a:solidFill>
+                <a:latin typeface="Noto Sans KR"/>
+              </a:rPr>
+              <a:t>5과정</a:t>
+            </a:r>
+          </a:p>
+        </p:txBody>
+      </p:sp>
+      <p:sp>
+        <p:nvSpPr>
+          <p:cNvPr id="33" name="TextBox 32"/>
+          <p:cNvSpPr txBox="1"/>
+          <p:nvPr/>
+        </p:nvSpPr>
+        <p:spPr>
+          <a:xfrm>
+            <a:off x="9173260" y="3584448"/>
+            <a:ext cx="2396642" cy="365760"/>
+          </a:xfrm>
+          <a:prstGeom prst="rect">
+            <a:avLst/>
+          </a:prstGeom>
+          <a:noFill/>
+        </p:spPr>
+        <p:txBody>
+          <a:bodyPr wrap="square" lIns="45720" tIns="18288" rIns="45720" bIns="18288" anchor="t">
+            <a:spAutoFit/>
+          </a:bodyPr>
+          <a:lstStyle/>
+          <a:p>
+            <a:pPr algn="l">
+              <a:lnSpc>
+                <a:spcPct val="112000"/>
+              </a:lnSpc>
+            </a:pPr>
+            <a:r>
+              <a:rPr sz="1100" b="1">
+                <a:solidFill>
+                  <a:srgbClr val="1E293B"/>
+                </a:solidFill>
+                <a:latin typeface="Noto Sans KR"/>
+              </a:rPr>
+              <a:t>Agentic AI(Mythos) 공격 대응</a:t>
+            </a:r>
+          </a:p>
+        </p:txBody>
+      </p:sp>
+      <p:sp>
+        <p:nvSpPr>
+          <p:cNvPr id="34" name="TextBox 33"/>
+          <p:cNvSpPr txBox="1"/>
+          <p:nvPr/>
+        </p:nvSpPr>
+        <p:spPr>
+          <a:xfrm>
+            <a:off x="9173260" y="3986784"/>
+            <a:ext cx="2396642" cy="658367"/>
+          </a:xfrm>
+          <a:prstGeom prst="rect">
+            <a:avLst/>
+          </a:prstGeom>
+          <a:noFill/>
+        </p:spPr>
+        <p:txBody>
+          <a:bodyPr wrap="square" lIns="45720" tIns="18288" rIns="45720" bIns="18288" anchor="t">
+            <a:spAutoFit/>
+          </a:bodyPr>
+          <a:lstStyle/>
+          <a:p>
+            <a:pPr algn="l">
+              <a:lnSpc>
+                <a:spcPct val="130000"/>
+              </a:lnSpc>
+            </a:pPr>
+            <a:r>
+              <a:rPr sz="1000" b="0">
+                <a:solidFill>
+                  <a:srgbClr val="475569"/>
+                </a:solidFill>
+                <a:latin typeface="Noto Sans KR"/>
+              </a:rPr>
+              <a:t>·  미토스 쇼크 등 자율 해킹 분석
+·  LLM 활용 취약점 탐지·지능형 제로트러스트 구현</a:t>
+            </a:r>
+          </a:p>
+        </p:txBody>
+      </p:sp>
+      <p:sp>
+        <p:nvSpPr>
+          <p:cNvPr id="35" name="Rounded Rectangle 34"/>
+          <p:cNvSpPr/>
+          <p:nvPr/>
+        </p:nvSpPr>
+        <p:spPr>
+          <a:xfrm>
+            <a:off x="457200" y="4956048"/>
+            <a:ext cx="2331720" cy="1554480"/>
+          </a:xfrm>
+          <a:prstGeom prst="roundRect">
+            <a:avLst>
+              <a:gd name="adj" fmla="val 5882"/>
+            </a:avLst>
+          </a:prstGeom>
+          <a:solidFill>
+            <a:srgbClr val="059669"/>
+          </a:solidFill>
+          <a:ln>
+            <a:noFill/>
+          </a:ln>
+        </p:spPr>
+        <p:style>
+          <a:lnRef idx="1">
+            <a:schemeClr val="accent1"/>
+          </a:lnRef>
+          <a:fillRef idx="3">
+            <a:schemeClr val="accent1"/>
+          </a:fillRef>
+          <a:effectRef idx="2">
+            <a:schemeClr val="accent1"/>
+          </a:effectRef>
+          <a:fontRef idx="minor">
+            <a:schemeClr val="lt1"/>
+          </a:fontRef>
+        </p:style>
+        <p:txBody>
+          <a:bodyPr rtlCol="0" anchor="ctr"/>
+          <a:lstStyle/>
+          <a:p>
+            <a:endParaRPr/>
+          </a:p>
+        </p:txBody>
+      </p:sp>
+      <p:sp>
+        <p:nvSpPr>
+          <p:cNvPr id="36" name="TextBox 35"/>
+          <p:cNvSpPr txBox="1"/>
+          <p:nvPr/>
+        </p:nvSpPr>
+        <p:spPr>
+          <a:xfrm>
+            <a:off x="640080" y="5120640"/>
+            <a:ext cx="1965960" cy="420624"/>
+          </a:xfrm>
+          <a:prstGeom prst="rect">
+            <a:avLst/>
+          </a:prstGeom>
+          <a:noFill/>
+        </p:spPr>
+        <p:txBody>
+          <a:bodyPr wrap="square" lIns="45720" tIns="18288" rIns="45720" bIns="18288" anchor="t">
+            <a:spAutoFit/>
+          </a:bodyPr>
+          <a:lstStyle/>
+          <a:p>
+            <a:pPr algn="l"/>
+            <a:r>
+              <a:rPr sz="1500" b="1">
+                <a:solidFill>
+                  <a:srgbClr val="FFFFFF"/>
+                </a:solidFill>
+                <a:latin typeface="Noto Sans KR"/>
+              </a:rPr>
+              <a:t>고급 (Advanced)</a:t>
+            </a:r>
+          </a:p>
+        </p:txBody>
+      </p:sp>
+      <p:sp>
+        <p:nvSpPr>
+          <p:cNvPr id="37" name="TextBox 36"/>
+          <p:cNvSpPr txBox="1"/>
+          <p:nvPr/>
+        </p:nvSpPr>
+        <p:spPr>
+          <a:xfrm>
+            <a:off x="640080" y="5614416"/>
+            <a:ext cx="1965960" cy="749808"/>
+          </a:xfrm>
+          <a:prstGeom prst="rect">
+            <a:avLst/>
+          </a:prstGeom>
+          <a:noFill/>
+        </p:spPr>
+        <p:txBody>
+          <a:bodyPr wrap="square" lIns="45720" tIns="18288" rIns="45720" bIns="18288" anchor="t">
+            <a:spAutoFit/>
+          </a:bodyPr>
+          <a:lstStyle/>
+          <a:p>
+            <a:pPr algn="l">
+              <a:lnSpc>
+                <a:spcPct val="118000"/>
+              </a:lnSpc>
+            </a:pPr>
+            <a:r>
+              <a:rPr sz="1250" b="1">
+                <a:solidFill>
+                  <a:srgbClr val="FFFFFF"/>
+                </a:solidFill>
+                <a:latin typeface="Noto Sans KR"/>
+              </a:rPr>
+              <a:t>LLM 심층 방어 및 회복</a:t>
+            </a:r>
+          </a:p>
+        </p:txBody>
+      </p:sp>
+      <p:sp>
+        <p:nvSpPr>
+          <p:cNvPr id="38" name="Rounded Rectangle 37"/>
+          <p:cNvSpPr/>
+          <p:nvPr/>
+        </p:nvSpPr>
+        <p:spPr>
+          <a:xfrm>
+            <a:off x="3008376" y="4956048"/>
+            <a:ext cx="4280763" cy="1554480"/>
+          </a:xfrm>
+          <a:prstGeom prst="roundRect">
+            <a:avLst>
+              <a:gd name="adj" fmla="val 4705"/>
+            </a:avLst>
+          </a:prstGeom>
+          <a:solidFill>
+            <a:srgbClr val="FFFFFF"/>
+          </a:solidFill>
+          <a:ln w="12700">
+            <a:solidFill>
+              <a:srgbClr val="E2E8F0"/>
+            </a:solidFill>
+          </a:ln>
+        </p:spPr>
+        <p:style>
+          <a:lnRef idx="1">
+            <a:schemeClr val="accent1"/>
+          </a:lnRef>
+          <a:fillRef idx="3">
+            <a:schemeClr val="accent1"/>
+          </a:fillRef>
+          <a:effectRef idx="2">
+            <a:schemeClr val="accent1"/>
+          </a:effectRef>
+          <a:fontRef idx="minor">
+            <a:schemeClr val="lt1"/>
+          </a:fontRef>
+        </p:style>
+        <p:txBody>
+          <a:bodyPr rtlCol="0" anchor="ctr"/>
+          <a:lstStyle/>
+          <a:p>
+            <a:endParaRPr/>
+          </a:p>
+        </p:txBody>
+      </p:sp>
+      <p:sp>
+        <p:nvSpPr>
+          <p:cNvPr id="39" name="Rectangle 38"/>
+          <p:cNvSpPr/>
+          <p:nvPr/>
+        </p:nvSpPr>
+        <p:spPr>
+          <a:xfrm>
+            <a:off x="3008376" y="5047488"/>
+            <a:ext cx="64008" cy="1371600"/>
+          </a:xfrm>
+          <a:prstGeom prst="rect">
+            <a:avLst/>
+          </a:prstGeom>
+          <a:solidFill>
+            <a:srgbClr val="059669"/>
+          </a:solidFill>
+          <a:ln>
+            <a:noFill/>
+          </a:ln>
+        </p:spPr>
+        <p:style>
+          <a:lnRef idx="1">
+            <a:schemeClr val="accent1"/>
+          </a:lnRef>
+          <a:fillRef idx="3">
+            <a:schemeClr val="accent1"/>
+          </a:fillRef>
+          <a:effectRef idx="2">
+            <a:schemeClr val="accent1"/>
+          </a:effectRef>
+          <a:fontRef idx="minor">
+            <a:schemeClr val="lt1"/>
+          </a:fontRef>
+        </p:style>
+        <p:txBody>
+          <a:bodyPr rtlCol="0" anchor="ctr"/>
+          <a:lstStyle/>
+          <a:p>
+            <a:endParaRPr/>
+          </a:p>
+        </p:txBody>
+      </p:sp>
+      <p:sp>
+        <p:nvSpPr>
+          <p:cNvPr id="40" name="TextBox 39"/>
+          <p:cNvSpPr txBox="1"/>
+          <p:nvPr/>
+        </p:nvSpPr>
+        <p:spPr>
+          <a:xfrm>
+            <a:off x="3246120" y="5084064"/>
+            <a:ext cx="3878427" cy="237744"/>
+          </a:xfrm>
+          <a:prstGeom prst="rect">
+            <a:avLst/>
+          </a:prstGeom>
+          <a:noFill/>
+        </p:spPr>
+        <p:txBody>
+          <a:bodyPr wrap="square" lIns="45720" tIns="18288" rIns="45720" bIns="18288" anchor="t">
+            <a:spAutoFit/>
+          </a:bodyPr>
+          <a:lstStyle/>
+          <a:p>
+            <a:pPr algn="l"/>
+            <a:r>
+              <a:rPr sz="1200" b="1">
+                <a:solidFill>
+                  <a:srgbClr val="059669"/>
+                </a:solidFill>
+                <a:latin typeface="Noto Sans KR"/>
+              </a:rPr>
+              <a:t>6과정</a:t>
+            </a:r>
+          </a:p>
+        </p:txBody>
+      </p:sp>
+      <p:sp>
+        <p:nvSpPr>
+          <p:cNvPr id="41" name="TextBox 40"/>
+          <p:cNvSpPr txBox="1"/>
+          <p:nvPr/>
+        </p:nvSpPr>
+        <p:spPr>
+          <a:xfrm>
+            <a:off x="3246120" y="5340096"/>
+            <a:ext cx="3878427" cy="365760"/>
+          </a:xfrm>
+          <a:prstGeom prst="rect">
+            <a:avLst/>
+          </a:prstGeom>
+          <a:noFill/>
+        </p:spPr>
+        <p:txBody>
+          <a:bodyPr wrap="square" lIns="45720" tIns="18288" rIns="45720" bIns="18288" anchor="t">
+            <a:spAutoFit/>
+          </a:bodyPr>
+          <a:lstStyle/>
+          <a:p>
+            <a:pPr algn="l">
+              <a:lnSpc>
+                <a:spcPct val="112000"/>
+              </a:lnSpc>
+            </a:pPr>
+            <a:r>
+              <a:rPr sz="1300" b="1">
+                <a:solidFill>
+                  <a:srgbClr val="1E293B"/>
+                </a:solidFill>
+                <a:latin typeface="Noto Sans KR"/>
+              </a:rPr>
+              <a:t>LLM 취약점 진단 및 방어</a:t>
+            </a:r>
+          </a:p>
+        </p:txBody>
+      </p:sp>
+      <p:sp>
+        <p:nvSpPr>
+          <p:cNvPr id="42" name="TextBox 41"/>
+          <p:cNvSpPr txBox="1"/>
+          <p:nvPr/>
+        </p:nvSpPr>
+        <p:spPr>
+          <a:xfrm>
+            <a:off x="3246120" y="5742432"/>
+            <a:ext cx="3878427" cy="658367"/>
+          </a:xfrm>
+          <a:prstGeom prst="rect">
+            <a:avLst/>
+          </a:prstGeom>
+          <a:noFill/>
+        </p:spPr>
+        <p:txBody>
+          <a:bodyPr wrap="square" lIns="45720" tIns="18288" rIns="45720" bIns="18288" anchor="t">
+            <a:spAutoFit/>
+          </a:bodyPr>
+          <a:lstStyle/>
+          <a:p>
+            <a:pPr algn="l">
+              <a:lnSpc>
+                <a:spcPct val="130000"/>
+              </a:lnSpc>
+            </a:pPr>
+            <a:r>
+              <a:rPr sz="1200" b="0">
+                <a:solidFill>
+                  <a:srgbClr val="475569"/>
+                </a:solidFill>
+                <a:latin typeface="Noto Sans KR"/>
+              </a:rPr>
+              <a:t>·  OWASP Top 10 for LLM 레드티밍 (공격 진단)
+·  입력값 필터링·가드레일 설치 (방어)</a:t>
+            </a:r>
+          </a:p>
+        </p:txBody>
+      </p:sp>
+      <p:sp>
+        <p:nvSpPr>
+          <p:cNvPr id="43" name="Rounded Rectangle 42"/>
+          <p:cNvSpPr/>
+          <p:nvPr/>
+        </p:nvSpPr>
+        <p:spPr>
+          <a:xfrm>
+            <a:off x="7453731" y="4956048"/>
+            <a:ext cx="4280763" cy="1554480"/>
+          </a:xfrm>
+          <a:prstGeom prst="roundRect">
+            <a:avLst>
+              <a:gd name="adj" fmla="val 4705"/>
+            </a:avLst>
+          </a:prstGeom>
+          <a:solidFill>
+            <a:srgbClr val="FFFFFF"/>
+          </a:solidFill>
+          <a:ln w="12700">
+            <a:solidFill>
+              <a:srgbClr val="E2E8F0"/>
+            </a:solidFill>
+          </a:ln>
+        </p:spPr>
+        <p:style>
+          <a:lnRef idx="1">
+            <a:schemeClr val="accent1"/>
+          </a:lnRef>
+          <a:fillRef idx="3">
+            <a:schemeClr val="accent1"/>
+          </a:fillRef>
+          <a:effectRef idx="2">
+            <a:schemeClr val="accent1"/>
+          </a:effectRef>
+          <a:fontRef idx="minor">
+            <a:schemeClr val="lt1"/>
+          </a:fontRef>
+        </p:style>
+        <p:txBody>
+          <a:bodyPr rtlCol="0" anchor="ctr"/>
+          <a:lstStyle/>
+          <a:p>
+            <a:endParaRPr/>
+          </a:p>
+        </p:txBody>
+      </p:sp>
+      <p:sp>
+        <p:nvSpPr>
+          <p:cNvPr id="44" name="Rectangle 43"/>
+          <p:cNvSpPr/>
+          <p:nvPr/>
+        </p:nvSpPr>
+        <p:spPr>
+          <a:xfrm>
+            <a:off x="7453731" y="5047488"/>
+            <a:ext cx="64008" cy="1371600"/>
+          </a:xfrm>
+          <a:prstGeom prst="rect">
+            <a:avLst/>
+          </a:prstGeom>
+          <a:solidFill>
+            <a:srgbClr val="059669"/>
+          </a:solidFill>
+          <a:ln>
+            <a:noFill/>
+          </a:ln>
+        </p:spPr>
+        <p:style>
+          <a:lnRef idx="1">
+            <a:schemeClr val="accent1"/>
+          </a:lnRef>
+          <a:fillRef idx="3">
+            <a:schemeClr val="accent1"/>
+          </a:fillRef>
+          <a:effectRef idx="2">
+            <a:schemeClr val="accent1"/>
+          </a:effectRef>
+          <a:fontRef idx="minor">
+            <a:schemeClr val="lt1"/>
+          </a:fontRef>
+        </p:style>
+        <p:txBody>
+          <a:bodyPr rtlCol="0" anchor="ctr"/>
+          <a:lstStyle/>
+          <a:p>
+            <a:endParaRPr/>
+          </a:p>
+        </p:txBody>
+      </p:sp>
+      <p:sp>
+        <p:nvSpPr>
+          <p:cNvPr id="45" name="TextBox 44"/>
+          <p:cNvSpPr txBox="1"/>
+          <p:nvPr/>
+        </p:nvSpPr>
+        <p:spPr>
+          <a:xfrm>
+            <a:off x="7691475" y="5084064"/>
+            <a:ext cx="3878427" cy="237744"/>
+          </a:xfrm>
+          <a:prstGeom prst="rect">
+            <a:avLst/>
+          </a:prstGeom>
+          <a:noFill/>
+        </p:spPr>
+        <p:txBody>
+          <a:bodyPr wrap="square" lIns="45720" tIns="18288" rIns="45720" bIns="18288" anchor="t">
+            <a:spAutoFit/>
+          </a:bodyPr>
+          <a:lstStyle/>
+          <a:p>
+            <a:pPr algn="l"/>
+            <a:r>
+              <a:rPr sz="1200" b="1">
+                <a:solidFill>
+                  <a:srgbClr val="059669"/>
+                </a:solidFill>
+                <a:latin typeface="Noto Sans KR"/>
+              </a:rPr>
+              <a:t>7과정</a:t>
+            </a:r>
+          </a:p>
+        </p:txBody>
+      </p:sp>
+      <p:sp>
+        <p:nvSpPr>
+          <p:cNvPr id="46" name="TextBox 45"/>
+          <p:cNvSpPr txBox="1"/>
+          <p:nvPr/>
+        </p:nvSpPr>
+        <p:spPr>
+          <a:xfrm>
+            <a:off x="7691475" y="5340096"/>
+            <a:ext cx="3878427" cy="365760"/>
+          </a:xfrm>
+          <a:prstGeom prst="rect">
+            <a:avLst/>
+          </a:prstGeom>
+          <a:noFill/>
+        </p:spPr>
+        <p:txBody>
+          <a:bodyPr wrap="square" lIns="45720" tIns="18288" rIns="45720" bIns="18288" anchor="t">
+            <a:spAutoFit/>
+          </a:bodyPr>
+          <a:lstStyle/>
+          <a:p>
+            <a:pPr algn="l">
+              <a:lnSpc>
+                <a:spcPct val="112000"/>
+              </a:lnSpc>
+            </a:pPr>
+            <a:r>
+              <a:rPr sz="1300" b="1">
+                <a:solidFill>
+                  <a:srgbClr val="1E293B"/>
+                </a:solidFill>
+                <a:latin typeface="Noto Sans KR"/>
+              </a:rPr>
+              <a:t>AI 침해대응 및 복구</a:t>
+            </a:r>
+          </a:p>
+        </p:txBody>
+      </p:sp>
+      <p:sp>
+        <p:nvSpPr>
+          <p:cNvPr id="47" name="TextBox 46"/>
+          <p:cNvSpPr txBox="1"/>
+          <p:nvPr/>
+        </p:nvSpPr>
+        <p:spPr>
+          <a:xfrm>
+            <a:off x="7691475" y="5742432"/>
+            <a:ext cx="3878427" cy="658367"/>
+          </a:xfrm>
+          <a:prstGeom prst="rect">
+            <a:avLst/>
+          </a:prstGeom>
+          <a:noFill/>
+        </p:spPr>
+        <p:txBody>
+          <a:bodyPr wrap="square" lIns="45720" tIns="18288" rIns="45720" bIns="18288" anchor="t">
+            <a:spAutoFit/>
+          </a:bodyPr>
+          <a:lstStyle/>
+          <a:p>
+            <a:pPr algn="l">
+              <a:lnSpc>
+                <a:spcPct val="130000"/>
+              </a:lnSpc>
+            </a:pPr>
+            <a:r>
+              <a:rPr sz="1200" b="0">
+                <a:solidFill>
+                  <a:srgbClr val="475569"/>
+                </a:solidFill>
+                <a:latin typeface="Noto Sans KR"/>
+              </a:rPr>
+              <a:t>·  AI 변칙 로그 및 적대적 침해 탐지
+·  모델 포렌식 및 회복 실습</a:t>
+            </a:r>
+          </a:p>
+        </p:txBody>
+      </p:sp>
+      <p:sp>
+        <p:nvSpPr>
+          <p:cNvPr id="48" name="TextBox 47"/>
+          <p:cNvSpPr txBox="1"/>
+          <p:nvPr/>
+        </p:nvSpPr>
+        <p:spPr>
+          <a:xfrm>
+            <a:off x="11734495" y="6492240"/>
+            <a:ext cx="365760" cy="228600"/>
+          </a:xfrm>
+          <a:prstGeom prst="rect">
+            <a:avLst/>
+          </a:prstGeom>
+          <a:noFill/>
+        </p:spPr>
+        <p:txBody>
+          <a:bodyPr wrap="square" lIns="45720" tIns="18288" rIns="45720" bIns="18288" anchor="t">
+            <a:spAutoFit/>
+          </a:bodyPr>
+          <a:lstStyle/>
+          <a:p>
+            <a:pPr algn="r"/>
+            <a:r>
+              <a:rPr sz="900" b="0">
+                <a:solidFill>
+                  <a:srgbClr val="94A3B8"/>
+                </a:solidFill>
+                <a:latin typeface="Noto Sans KR"/>
+              </a:rPr>
+              <a:t>3</a:t>
+            </a:r>
+          </a:p>
+        </p:txBody>
+      </p:sp>
+    </p:spTree>
+  </p:cSld>
+  <p:clrMapOvr>
+    <a:masterClrMapping/>
+  </p:clrMapOvr>
+</p:sld>
+</file>
+
+<file path=ppt/slides/slide4.xml><?xml version="1.0" encoding="utf-8"?>
+<p:sld xmlns:a="http://schemas.openxmlformats.org/drawingml/2006/main" xmlns:r="http://schemas.openxmlformats.org/officeDocument/2006/relationships" xmlns:p="http://schemas.openxmlformats.org/presentationml/2006/main">
+  <p:cSld>
+    <p:spTree>
+      <p:nvGrpSpPr>
+        <p:cNvPr id="1" name=""/>
+        <p:cNvGrpSpPr/>
+        <p:nvPr/>
+      </p:nvGrpSpPr>
+      <p:grpSpPr>
+        <a:xfrm>
+          <a:off x="0" y="0"/>
+          <a:ext cx="0" cy="0"/>
+          <a:chOff x="0" y="0"/>
+          <a:chExt cx="0" cy="0"/>
+        </a:xfrm>
+      </p:grpSpPr>
+      <p:sp>
+        <p:nvSpPr>
+          <p:cNvPr id="2" name="TextBox 1"/>
+          <p:cNvSpPr txBox="1"/>
+          <p:nvPr/>
+        </p:nvSpPr>
+        <p:spPr>
+          <a:xfrm>
+            <a:off x="658368" y="512064"/>
+            <a:ext cx="10893247" cy="731520"/>
+          </a:xfrm>
+          <a:prstGeom prst="rect">
+            <a:avLst/>
+          </a:prstGeom>
+          <a:noFill/>
+        </p:spPr>
+        <p:txBody>
+          <a:bodyPr wrap="square" lIns="45720" tIns="18288" rIns="45720" bIns="18288" anchor="t">
+            <a:spAutoFit/>
+          </a:bodyPr>
+          <a:lstStyle/>
+          <a:p>
+            <a:pPr algn="l"/>
+            <a:r>
+              <a:rPr sz="2700" b="1">
+                <a:solidFill>
+                  <a:srgbClr val="1B2330"/>
+                </a:solidFill>
+                <a:latin typeface="Noto Sans KR"/>
+              </a:rPr>
+              <a:t>수준별 3단계 7과정 — AI 사이버보안 학습 경로</a:t>
+            </a:r>
+          </a:p>
+        </p:txBody>
+      </p:sp>
+      <p:sp>
+        <p:nvSpPr>
+          <p:cNvPr id="3" name="TextBox 2"/>
+          <p:cNvSpPr txBox="1"/>
+          <p:nvPr/>
+        </p:nvSpPr>
+        <p:spPr>
+          <a:xfrm>
+            <a:off x="676656" y="1188720"/>
+            <a:ext cx="10820095" cy="365760"/>
+          </a:xfrm>
+          <a:prstGeom prst="rect">
+            <a:avLst/>
+          </a:prstGeom>
+          <a:noFill/>
+        </p:spPr>
+        <p:txBody>
+          <a:bodyPr wrap="square" lIns="45720" tIns="18288" rIns="45720" bIns="18288" anchor="t">
+            <a:spAutoFit/>
+          </a:bodyPr>
+          <a:lstStyle/>
+          <a:p>
+            <a:pPr algn="l"/>
+            <a:r>
+              <a:rPr sz="1300" b="0">
+                <a:solidFill>
+                  <a:srgbClr val="5B6470"/>
+                </a:solidFill>
+                <a:latin typeface="Noto Sans KR"/>
+              </a:rPr>
+              <a:t>초급 안전한 활용 → 중급 AI for Security → 고급 Security for AI · 전체 과정의 25%를 AI 보안으로 구성</a:t>
+            </a:r>
+          </a:p>
+        </p:txBody>
+      </p:sp>
+      <p:sp>
+        <p:nvSpPr>
+          <p:cNvPr id="4" name="Rounded Rectangle 3"/>
+          <p:cNvSpPr/>
+          <p:nvPr/>
+        </p:nvSpPr>
+        <p:spPr>
+          <a:xfrm>
+            <a:off x="457200" y="1691640"/>
+            <a:ext cx="3545738" cy="4206240"/>
+          </a:xfrm>
+          <a:prstGeom prst="roundRect">
+            <a:avLst>
+              <a:gd name="adj" fmla="val 3094"/>
+            </a:avLst>
+          </a:prstGeom>
+          <a:solidFill>
+            <a:srgbClr val="E6F0FB"/>
+          </a:solidFill>
+          <a:ln w="12700">
+            <a:solidFill>
+              <a:srgbClr val="E2E8F0"/>
+            </a:solidFill>
+          </a:ln>
+        </p:spPr>
+        <p:style>
+          <a:lnRef idx="1">
+            <a:schemeClr val="accent1"/>
+          </a:lnRef>
+          <a:fillRef idx="3">
+            <a:schemeClr val="accent1"/>
+          </a:fillRef>
+          <a:effectRef idx="2">
+            <a:schemeClr val="accent1"/>
+          </a:effectRef>
+          <a:fontRef idx="minor">
+            <a:schemeClr val="lt1"/>
+          </a:fontRef>
+        </p:style>
+        <p:txBody>
+          <a:bodyPr rtlCol="0" anchor="ctr"/>
+          <a:lstStyle/>
+          <a:p>
+            <a:endParaRPr/>
+          </a:p>
+        </p:txBody>
+      </p:sp>
+      <p:sp>
+        <p:nvSpPr>
+          <p:cNvPr id="5" name="TextBox 4"/>
+          <p:cNvSpPr txBox="1"/>
+          <p:nvPr/>
+        </p:nvSpPr>
+        <p:spPr>
+          <a:xfrm>
+            <a:off x="640080" y="1828800"/>
+            <a:ext cx="3179978" cy="365760"/>
+          </a:xfrm>
+          <a:prstGeom prst="rect">
+            <a:avLst/>
+          </a:prstGeom>
+          <a:noFill/>
+        </p:spPr>
+        <p:txBody>
+          <a:bodyPr wrap="square" lIns="45720" tIns="18288" rIns="45720" bIns="18288" anchor="ctr">
+            <a:spAutoFit/>
+          </a:bodyPr>
+          <a:lstStyle/>
+          <a:p>
+            <a:pPr algn="l"/>
+            <a:r>
+              <a:rPr sz="1200" b="1">
+                <a:solidFill>
+                  <a:srgbClr val="1C75C9"/>
+                </a:solidFill>
+                <a:latin typeface="Noto Sans KR"/>
+              </a:rPr>
+              <a:t>초급 · 안전한 AI 활용</a:t>
+            </a:r>
+          </a:p>
+        </p:txBody>
+      </p:sp>
+      <p:sp>
+        <p:nvSpPr>
+          <p:cNvPr id="6" name="Rounded Rectangle 5"/>
+          <p:cNvSpPr/>
+          <p:nvPr/>
+        </p:nvSpPr>
+        <p:spPr>
+          <a:xfrm>
+            <a:off x="685800" y="2697479"/>
+            <a:ext cx="3088538" cy="1280160"/>
+          </a:xfrm>
+          <a:prstGeom prst="roundRect">
+            <a:avLst>
+              <a:gd name="adj" fmla="val 5714"/>
+            </a:avLst>
+          </a:prstGeom>
+          <a:solidFill>
+            <a:srgbClr val="FFFFFF"/>
+          </a:solidFill>
+          <a:ln w="12700">
+            <a:solidFill>
+              <a:srgbClr val="E2E8F0"/>
+            </a:solidFill>
+          </a:ln>
+        </p:spPr>
+        <p:style>
+          <a:lnRef idx="1">
+            <a:schemeClr val="accent1"/>
+          </a:lnRef>
+          <a:fillRef idx="3">
+            <a:schemeClr val="accent1"/>
+          </a:fillRef>
+          <a:effectRef idx="2">
+            <a:schemeClr val="accent1"/>
+          </a:effectRef>
+          <a:fontRef idx="minor">
+            <a:schemeClr val="lt1"/>
+          </a:fontRef>
+        </p:style>
+        <p:txBody>
+          <a:bodyPr rtlCol="0" anchor="ctr"/>
+          <a:lstStyle/>
+          <a:p>
+            <a:endParaRPr/>
+          </a:p>
+        </p:txBody>
+      </p:sp>
+      <p:sp>
+        <p:nvSpPr>
+          <p:cNvPr id="7" name="TextBox 6"/>
+          <p:cNvSpPr txBox="1"/>
+          <p:nvPr/>
+        </p:nvSpPr>
+        <p:spPr>
+          <a:xfrm>
+            <a:off x="822960" y="2834639"/>
+            <a:ext cx="2814218" cy="457200"/>
+          </a:xfrm>
+          <a:prstGeom prst="rect">
+            <a:avLst/>
+          </a:prstGeom>
+          <a:noFill/>
+        </p:spPr>
+        <p:txBody>
+          <a:bodyPr wrap="square" lIns="45720" tIns="18288" rIns="45720" bIns="18288" anchor="t">
+            <a:spAutoFit/>
+          </a:bodyPr>
+          <a:lstStyle/>
+          <a:p>
+            <a:pPr algn="l"/>
+            <a:r>
+              <a:rPr sz="1300" b="1">
+                <a:solidFill>
+                  <a:srgbClr val="1C75C9"/>
+                </a:solidFill>
+                <a:latin typeface="Noto Sans KR"/>
+              </a:rPr>
+              <a:t>1과정 · AI 보안의 이해</a:t>
+            </a:r>
+          </a:p>
+        </p:txBody>
+      </p:sp>
+      <p:sp>
+        <p:nvSpPr>
+          <p:cNvPr id="8" name="TextBox 7"/>
+          <p:cNvSpPr txBox="1"/>
+          <p:nvPr/>
+        </p:nvSpPr>
+        <p:spPr>
+          <a:xfrm>
+            <a:off x="822960" y="3328415"/>
+            <a:ext cx="2814218" cy="557784"/>
+          </a:xfrm>
+          <a:prstGeom prst="rect">
+            <a:avLst/>
+          </a:prstGeom>
+          <a:noFill/>
+        </p:spPr>
+        <p:txBody>
+          <a:bodyPr wrap="square" lIns="45720" tIns="18288" rIns="45720" bIns="18288" anchor="t">
+            <a:spAutoFit/>
+          </a:bodyPr>
+          <a:lstStyle/>
+          <a:p>
+            <a:pPr algn="l"/>
+            <a:r>
+              <a:rPr sz="1100" b="0">
+                <a:solidFill>
+                  <a:srgbClr val="475569"/>
+                </a:solidFill>
+                <a:latin typeface="Noto Sans KR"/>
+              </a:rPr>
+              <a:t>AI 원리·위협 모델링 · 프롬프트 인젝션 분석</a:t>
+            </a:r>
+          </a:p>
+        </p:txBody>
+      </p:sp>
+      <p:sp>
+        <p:nvSpPr>
+          <p:cNvPr id="9" name="Rounded Rectangle 8"/>
+          <p:cNvSpPr/>
+          <p:nvPr/>
+        </p:nvSpPr>
+        <p:spPr>
+          <a:xfrm>
+            <a:off x="685800" y="4160520"/>
+            <a:ext cx="3088538" cy="1280160"/>
+          </a:xfrm>
+          <a:prstGeom prst="roundRect">
+            <a:avLst>
+              <a:gd name="adj" fmla="val 5714"/>
+            </a:avLst>
+          </a:prstGeom>
+          <a:solidFill>
+            <a:srgbClr val="FFFFFF"/>
+          </a:solidFill>
+          <a:ln w="12700">
+            <a:solidFill>
+              <a:srgbClr val="E2E8F0"/>
+            </a:solidFill>
+          </a:ln>
+        </p:spPr>
+        <p:style>
+          <a:lnRef idx="1">
+            <a:schemeClr val="accent1"/>
+          </a:lnRef>
+          <a:fillRef idx="3">
+            <a:schemeClr val="accent1"/>
+          </a:fillRef>
+          <a:effectRef idx="2">
+            <a:schemeClr val="accent1"/>
+          </a:effectRef>
+          <a:fontRef idx="minor">
+            <a:schemeClr val="lt1"/>
+          </a:fontRef>
+        </p:style>
+        <p:txBody>
+          <a:bodyPr rtlCol="0" anchor="ctr"/>
+          <a:lstStyle/>
+          <a:p>
+            <a:endParaRPr/>
+          </a:p>
+        </p:txBody>
+      </p:sp>
+      <p:sp>
+        <p:nvSpPr>
+          <p:cNvPr id="10" name="TextBox 9"/>
+          <p:cNvSpPr txBox="1"/>
+          <p:nvPr/>
+        </p:nvSpPr>
+        <p:spPr>
+          <a:xfrm>
+            <a:off x="822960" y="4297680"/>
+            <a:ext cx="2814218" cy="457200"/>
+          </a:xfrm>
+          <a:prstGeom prst="rect">
+            <a:avLst/>
+          </a:prstGeom>
+          <a:noFill/>
+        </p:spPr>
+        <p:txBody>
+          <a:bodyPr wrap="square" lIns="45720" tIns="18288" rIns="45720" bIns="18288" anchor="t">
+            <a:spAutoFit/>
+          </a:bodyPr>
+          <a:lstStyle/>
+          <a:p>
+            <a:pPr algn="l"/>
+            <a:r>
+              <a:rPr sz="1300" b="1">
+                <a:solidFill>
+                  <a:srgbClr val="1C75C9"/>
+                </a:solidFill>
+                <a:latin typeface="Noto Sans KR"/>
+              </a:rPr>
+              <a:t>2과정 · AI 보안업무 자동화·활용</a:t>
+            </a:r>
+          </a:p>
+        </p:txBody>
+      </p:sp>
+      <p:sp>
+        <p:nvSpPr>
+          <p:cNvPr id="11" name="TextBox 10"/>
+          <p:cNvSpPr txBox="1"/>
+          <p:nvPr/>
+        </p:nvSpPr>
+        <p:spPr>
+          <a:xfrm>
+            <a:off x="822960" y="4791456"/>
+            <a:ext cx="2814218" cy="557783"/>
+          </a:xfrm>
+          <a:prstGeom prst="rect">
+            <a:avLst/>
+          </a:prstGeom>
+          <a:noFill/>
+        </p:spPr>
+        <p:txBody>
+          <a:bodyPr wrap="square" lIns="45720" tIns="18288" rIns="45720" bIns="18288" anchor="t">
+            <a:spAutoFit/>
+          </a:bodyPr>
+          <a:lstStyle/>
+          <a:p>
+            <a:pPr algn="l"/>
+            <a:r>
+              <a:rPr sz="1100" b="0">
+                <a:solidFill>
+                  <a:srgbClr val="475569"/>
+                </a:solidFill>
+                <a:latin typeface="Noto Sans KR"/>
+              </a:rPr>
+              <a:t>보안업무 자동화 · 안전한 개발환경 구축</a:t>
+            </a:r>
+          </a:p>
+        </p:txBody>
+      </p:sp>
+      <p:sp>
+        <p:nvSpPr>
+          <p:cNvPr id="12" name="Rounded Rectangle 11"/>
+          <p:cNvSpPr/>
+          <p:nvPr/>
+        </p:nvSpPr>
+        <p:spPr>
+          <a:xfrm>
+            <a:off x="4322978" y="1691640"/>
+            <a:ext cx="3545738" cy="4206240"/>
+          </a:xfrm>
+          <a:prstGeom prst="roundRect">
+            <a:avLst>
+              <a:gd name="adj" fmla="val 3094"/>
+            </a:avLst>
+          </a:prstGeom>
+          <a:solidFill>
+            <a:srgbClr val="E6F0FB"/>
+          </a:solidFill>
+          <a:ln w="12700">
+            <a:solidFill>
+              <a:srgbClr val="E2E8F0"/>
+            </a:solidFill>
+          </a:ln>
+        </p:spPr>
+        <p:style>
+          <a:lnRef idx="1">
+            <a:schemeClr val="accent1"/>
+          </a:lnRef>
+          <a:fillRef idx="3">
+            <a:schemeClr val="accent1"/>
+          </a:fillRef>
+          <a:effectRef idx="2">
+            <a:schemeClr val="accent1"/>
+          </a:effectRef>
+          <a:fontRef idx="minor">
+            <a:schemeClr val="lt1"/>
+          </a:fontRef>
+        </p:style>
+        <p:txBody>
+          <a:bodyPr rtlCol="0" anchor="ctr"/>
+          <a:lstStyle/>
+          <a:p>
+            <a:endParaRPr/>
+          </a:p>
+        </p:txBody>
+      </p:sp>
+      <p:sp>
+        <p:nvSpPr>
+          <p:cNvPr id="13" name="TextBox 12"/>
+          <p:cNvSpPr txBox="1"/>
+          <p:nvPr/>
+        </p:nvSpPr>
+        <p:spPr>
+          <a:xfrm>
+            <a:off x="4505858" y="1828800"/>
+            <a:ext cx="3179978" cy="365760"/>
+          </a:xfrm>
+          <a:prstGeom prst="rect">
+            <a:avLst/>
+          </a:prstGeom>
+          <a:noFill/>
+        </p:spPr>
+        <p:txBody>
+          <a:bodyPr wrap="square" lIns="45720" tIns="18288" rIns="45720" bIns="18288" anchor="ctr">
+            <a:spAutoFit/>
+          </a:bodyPr>
+          <a:lstStyle/>
+          <a:p>
+            <a:pPr algn="l"/>
+            <a:r>
+              <a:rPr sz="1200" b="1">
+                <a:solidFill>
+                  <a:srgbClr val="1C75C9"/>
+                </a:solidFill>
+                <a:latin typeface="Noto Sans KR"/>
+              </a:rPr>
+              <a:t>중급 · 지능형 보안 활용</a:t>
+            </a:r>
+          </a:p>
+        </p:txBody>
+      </p:sp>
+      <p:sp>
+        <p:nvSpPr>
+          <p:cNvPr id="14" name="Rounded Rectangle 13"/>
+          <p:cNvSpPr/>
+          <p:nvPr/>
+        </p:nvSpPr>
+        <p:spPr>
+          <a:xfrm>
+            <a:off x="4551578" y="2240280"/>
+            <a:ext cx="3088538" cy="1097280"/>
+          </a:xfrm>
+          <a:prstGeom prst="roundRect">
+            <a:avLst>
+              <a:gd name="adj" fmla="val 6666"/>
+            </a:avLst>
+          </a:prstGeom>
+          <a:solidFill>
+            <a:srgbClr val="FFFFFF"/>
+          </a:solidFill>
+          <a:ln w="12700">
+            <a:solidFill>
+              <a:srgbClr val="E2E8F0"/>
+            </a:solidFill>
+          </a:ln>
+        </p:spPr>
+        <p:style>
+          <a:lnRef idx="1">
+            <a:schemeClr val="accent1"/>
+          </a:lnRef>
+          <a:fillRef idx="3">
+            <a:schemeClr val="accent1"/>
+          </a:fillRef>
+          <a:effectRef idx="2">
+            <a:schemeClr val="accent1"/>
+          </a:effectRef>
+          <a:fontRef idx="minor">
+            <a:schemeClr val="lt1"/>
+          </a:fontRef>
+        </p:style>
+        <p:txBody>
+          <a:bodyPr rtlCol="0" anchor="ctr"/>
+          <a:lstStyle/>
+          <a:p>
+            <a:endParaRPr/>
+          </a:p>
+        </p:txBody>
+      </p:sp>
+      <p:sp>
+        <p:nvSpPr>
+          <p:cNvPr id="15" name="TextBox 14"/>
+          <p:cNvSpPr txBox="1"/>
+          <p:nvPr/>
+        </p:nvSpPr>
+        <p:spPr>
+          <a:xfrm>
+            <a:off x="4688738" y="2377440"/>
+            <a:ext cx="2814218" cy="457200"/>
+          </a:xfrm>
+          <a:prstGeom prst="rect">
+            <a:avLst/>
+          </a:prstGeom>
+          <a:noFill/>
+        </p:spPr>
+        <p:txBody>
+          <a:bodyPr wrap="square" lIns="45720" tIns="18288" rIns="45720" bIns="18288" anchor="t">
+            <a:spAutoFit/>
+          </a:bodyPr>
+          <a:lstStyle/>
+          <a:p>
+            <a:pPr algn="l"/>
+            <a:r>
+              <a:rPr sz="1300" b="1">
+                <a:solidFill>
+                  <a:srgbClr val="1C75C9"/>
+                </a:solidFill>
+                <a:latin typeface="Noto Sans KR"/>
+              </a:rPr>
+              <a:t>3과정 · 안전한 로컬 LLM 구축</a:t>
+            </a:r>
+          </a:p>
+        </p:txBody>
+      </p:sp>
+      <p:sp>
+        <p:nvSpPr>
+          <p:cNvPr id="16" name="TextBox 15"/>
+          <p:cNvSpPr txBox="1"/>
+          <p:nvPr/>
+        </p:nvSpPr>
+        <p:spPr>
+          <a:xfrm>
+            <a:off x="4688738" y="2871216"/>
+            <a:ext cx="2814218" cy="374904"/>
+          </a:xfrm>
+          <a:prstGeom prst="rect">
+            <a:avLst/>
+          </a:prstGeom>
+          <a:noFill/>
+        </p:spPr>
+        <p:txBody>
+          <a:bodyPr wrap="square" lIns="45720" tIns="18288" rIns="45720" bIns="18288" anchor="t">
+            <a:spAutoFit/>
+          </a:bodyPr>
+          <a:lstStyle/>
+          <a:p>
+            <a:pPr algn="l"/>
+            <a:r>
+              <a:rPr sz="1100" b="0">
+                <a:solidFill>
+                  <a:srgbClr val="475569"/>
+                </a:solidFill>
+                <a:latin typeface="Noto Sans KR"/>
+              </a:rPr>
+              <a:t>온프레미스 sLLM · RAG·파인튜닝</a:t>
+            </a:r>
+          </a:p>
+        </p:txBody>
+      </p:sp>
+      <p:sp>
+        <p:nvSpPr>
+          <p:cNvPr id="17" name="Rounded Rectangle 16"/>
+          <p:cNvSpPr/>
+          <p:nvPr/>
+        </p:nvSpPr>
+        <p:spPr>
+          <a:xfrm>
+            <a:off x="4551578" y="3520440"/>
+            <a:ext cx="3088538" cy="1097280"/>
+          </a:xfrm>
+          <a:prstGeom prst="roundRect">
+            <a:avLst>
+              <a:gd name="adj" fmla="val 6666"/>
+            </a:avLst>
+          </a:prstGeom>
+          <a:solidFill>
+            <a:srgbClr val="FFFFFF"/>
+          </a:solidFill>
+          <a:ln w="12700">
+            <a:solidFill>
+              <a:srgbClr val="E2E8F0"/>
+            </a:solidFill>
+          </a:ln>
+        </p:spPr>
+        <p:style>
+          <a:lnRef idx="1">
+            <a:schemeClr val="accent1"/>
+          </a:lnRef>
+          <a:fillRef idx="3">
+            <a:schemeClr val="accent1"/>
+          </a:fillRef>
+          <a:effectRef idx="2">
+            <a:schemeClr val="accent1"/>
+          </a:effectRef>
+          <a:fontRef idx="minor">
+            <a:schemeClr val="lt1"/>
+          </a:fontRef>
+        </p:style>
+        <p:txBody>
+          <a:bodyPr rtlCol="0" anchor="ctr"/>
+          <a:lstStyle/>
+          <a:p>
+            <a:endParaRPr/>
+          </a:p>
+        </p:txBody>
+      </p:sp>
+      <p:sp>
+        <p:nvSpPr>
+          <p:cNvPr id="18" name="TextBox 17"/>
+          <p:cNvSpPr txBox="1"/>
+          <p:nvPr/>
+        </p:nvSpPr>
+        <p:spPr>
+          <a:xfrm>
+            <a:off x="4688738" y="3657600"/>
+            <a:ext cx="2814218" cy="457200"/>
+          </a:xfrm>
+          <a:prstGeom prst="rect">
+            <a:avLst/>
+          </a:prstGeom>
+          <a:noFill/>
+        </p:spPr>
+        <p:txBody>
+          <a:bodyPr wrap="square" lIns="45720" tIns="18288" rIns="45720" bIns="18288" anchor="t">
+            <a:spAutoFit/>
+          </a:bodyPr>
+          <a:lstStyle/>
+          <a:p>
+            <a:pPr algn="l"/>
+            <a:r>
+              <a:rPr sz="1200" b="1">
+                <a:solidFill>
+                  <a:srgbClr val="1C75C9"/>
+                </a:solidFill>
+                <a:latin typeface="Noto Sans KR"/>
+              </a:rPr>
+              <a:t>4과정 · 로컬 LLM 활용 사이버보안</a:t>
+            </a:r>
+          </a:p>
+        </p:txBody>
+      </p:sp>
+      <p:sp>
+        <p:nvSpPr>
+          <p:cNvPr id="19" name="TextBox 18"/>
+          <p:cNvSpPr txBox="1"/>
+          <p:nvPr/>
+        </p:nvSpPr>
+        <p:spPr>
+          <a:xfrm>
+            <a:off x="4688738" y="4151376"/>
+            <a:ext cx="2814218" cy="374904"/>
+          </a:xfrm>
+          <a:prstGeom prst="rect">
+            <a:avLst/>
+          </a:prstGeom>
+          <a:noFill/>
+        </p:spPr>
+        <p:txBody>
+          <a:bodyPr wrap="square" lIns="45720" tIns="18288" rIns="45720" bIns="18288" anchor="t">
+            <a:spAutoFit/>
+          </a:bodyPr>
+          <a:lstStyle/>
+          <a:p>
+            <a:pPr algn="l"/>
+            <a:r>
+              <a:rPr sz="1100" b="0">
+                <a:solidFill>
+                  <a:srgbClr val="475569"/>
+                </a:solidFill>
+                <a:latin typeface="Noto Sans KR"/>
+              </a:rPr>
+              <a:t>ML 악성코드 분석 · SOAR/CTI 관제</a:t>
+            </a:r>
+          </a:p>
+        </p:txBody>
+      </p:sp>
+      <p:sp>
+        <p:nvSpPr>
+          <p:cNvPr id="20" name="Rounded Rectangle 19"/>
+          <p:cNvSpPr/>
+          <p:nvPr/>
+        </p:nvSpPr>
+        <p:spPr>
+          <a:xfrm>
+            <a:off x="4551578" y="4800600"/>
+            <a:ext cx="3088538" cy="1097280"/>
+          </a:xfrm>
+          <a:prstGeom prst="roundRect">
+            <a:avLst>
+              <a:gd name="adj" fmla="val 6666"/>
+            </a:avLst>
+          </a:prstGeom>
+          <a:solidFill>
+            <a:srgbClr val="FFFFFF"/>
+          </a:solidFill>
+          <a:ln w="12700">
+            <a:solidFill>
+              <a:srgbClr val="E2E8F0"/>
+            </a:solidFill>
+          </a:ln>
+        </p:spPr>
+        <p:style>
+          <a:lnRef idx="1">
+            <a:schemeClr val="accent1"/>
+          </a:lnRef>
+          <a:fillRef idx="3">
+            <a:schemeClr val="accent1"/>
+          </a:fillRef>
+          <a:effectRef idx="2">
+            <a:schemeClr val="accent1"/>
+          </a:effectRef>
+          <a:fontRef idx="minor">
+            <a:schemeClr val="lt1"/>
+          </a:fontRef>
+        </p:style>
+        <p:txBody>
+          <a:bodyPr rtlCol="0" anchor="ctr"/>
+          <a:lstStyle/>
+          <a:p>
+            <a:endParaRPr/>
+          </a:p>
+        </p:txBody>
+      </p:sp>
+      <p:sp>
+        <p:nvSpPr>
+          <p:cNvPr id="21" name="TextBox 20"/>
+          <p:cNvSpPr txBox="1"/>
+          <p:nvPr/>
+        </p:nvSpPr>
+        <p:spPr>
+          <a:xfrm>
+            <a:off x="4688738" y="4937760"/>
+            <a:ext cx="2814218" cy="457200"/>
+          </a:xfrm>
+          <a:prstGeom prst="rect">
+            <a:avLst/>
+          </a:prstGeom>
+          <a:noFill/>
+        </p:spPr>
+        <p:txBody>
+          <a:bodyPr wrap="square" lIns="45720" tIns="18288" rIns="45720" bIns="18288" anchor="t">
+            <a:spAutoFit/>
+          </a:bodyPr>
+          <a:lstStyle/>
+          <a:p>
+            <a:pPr algn="l"/>
+            <a:r>
+              <a:rPr sz="1200" b="1">
+                <a:solidFill>
+                  <a:srgbClr val="1C75C9"/>
+                </a:solidFill>
+                <a:latin typeface="Noto Sans KR"/>
+              </a:rPr>
+              <a:t>5과정 · Agentic AI(Mythos) 대응</a:t>
+            </a:r>
+          </a:p>
+        </p:txBody>
+      </p:sp>
+      <p:sp>
+        <p:nvSpPr>
+          <p:cNvPr id="22" name="TextBox 21"/>
+          <p:cNvSpPr txBox="1"/>
+          <p:nvPr/>
+        </p:nvSpPr>
+        <p:spPr>
+          <a:xfrm>
+            <a:off x="4688738" y="5431536"/>
+            <a:ext cx="2814218" cy="374903"/>
+          </a:xfrm>
+          <a:prstGeom prst="rect">
+            <a:avLst/>
+          </a:prstGeom>
+          <a:noFill/>
+        </p:spPr>
+        <p:txBody>
+          <a:bodyPr wrap="square" lIns="45720" tIns="18288" rIns="45720" bIns="18288" anchor="t">
+            <a:spAutoFit/>
+          </a:bodyPr>
+          <a:lstStyle/>
+          <a:p>
+            <a:pPr algn="l"/>
+            <a:r>
+              <a:rPr sz="1100" b="0">
+                <a:solidFill>
+                  <a:srgbClr val="475569"/>
+                </a:solidFill>
+                <a:latin typeface="Noto Sans KR"/>
+              </a:rPr>
+              <a:t>자율해킹 분석 · 지능형 제로트러스트</a:t>
+            </a:r>
+          </a:p>
+        </p:txBody>
+      </p:sp>
+      <p:sp>
+        <p:nvSpPr>
+          <p:cNvPr id="23" name="Rounded Rectangle 22"/>
+          <p:cNvSpPr/>
+          <p:nvPr/>
+        </p:nvSpPr>
+        <p:spPr>
+          <a:xfrm>
+            <a:off x="8188756" y="1691640"/>
+            <a:ext cx="3545738" cy="4206240"/>
+          </a:xfrm>
+          <a:prstGeom prst="roundRect">
+            <a:avLst>
+              <a:gd name="adj" fmla="val 3094"/>
+            </a:avLst>
+          </a:prstGeom>
+          <a:solidFill>
+            <a:srgbClr val="E6F0FB"/>
+          </a:solidFill>
+          <a:ln w="12700">
+            <a:solidFill>
+              <a:srgbClr val="E2E8F0"/>
+            </a:solidFill>
+          </a:ln>
+        </p:spPr>
+        <p:style>
+          <a:lnRef idx="1">
+            <a:schemeClr val="accent1"/>
+          </a:lnRef>
+          <a:fillRef idx="3">
+            <a:schemeClr val="accent1"/>
+          </a:fillRef>
+          <a:effectRef idx="2">
+            <a:schemeClr val="accent1"/>
+          </a:effectRef>
+          <a:fontRef idx="minor">
+            <a:schemeClr val="lt1"/>
+          </a:fontRef>
+        </p:style>
+        <p:txBody>
+          <a:bodyPr rtlCol="0" anchor="ctr"/>
+          <a:lstStyle/>
+          <a:p>
+            <a:endParaRPr/>
+          </a:p>
+        </p:txBody>
+      </p:sp>
+      <p:sp>
+        <p:nvSpPr>
+          <p:cNvPr id="24" name="TextBox 23"/>
+          <p:cNvSpPr txBox="1"/>
+          <p:nvPr/>
+        </p:nvSpPr>
+        <p:spPr>
+          <a:xfrm>
+            <a:off x="8371636" y="1828800"/>
+            <a:ext cx="3179978" cy="365760"/>
+          </a:xfrm>
+          <a:prstGeom prst="rect">
+            <a:avLst/>
+          </a:prstGeom>
+          <a:noFill/>
+        </p:spPr>
+        <p:txBody>
+          <a:bodyPr wrap="square" lIns="45720" tIns="18288" rIns="45720" bIns="18288" anchor="ctr">
+            <a:spAutoFit/>
+          </a:bodyPr>
+          <a:lstStyle/>
+          <a:p>
+            <a:pPr algn="l"/>
+            <a:r>
+              <a:rPr sz="1200" b="1">
+                <a:solidFill>
+                  <a:srgbClr val="1C75C9"/>
+                </a:solidFill>
+                <a:latin typeface="Noto Sans KR"/>
+              </a:rPr>
+              <a:t>고급 · AI 심층 방어·회복</a:t>
+            </a:r>
+          </a:p>
+        </p:txBody>
+      </p:sp>
+      <p:sp>
+        <p:nvSpPr>
+          <p:cNvPr id="25" name="Rounded Rectangle 24"/>
+          <p:cNvSpPr/>
+          <p:nvPr/>
+        </p:nvSpPr>
+        <p:spPr>
+          <a:xfrm>
+            <a:off x="8417356" y="2697479"/>
+            <a:ext cx="3088538" cy="1280160"/>
+          </a:xfrm>
+          <a:prstGeom prst="roundRect">
+            <a:avLst>
+              <a:gd name="adj" fmla="val 5714"/>
+            </a:avLst>
+          </a:prstGeom>
+          <a:solidFill>
+            <a:srgbClr val="FFFFFF"/>
+          </a:solidFill>
+          <a:ln w="12700">
+            <a:solidFill>
+              <a:srgbClr val="E2E8F0"/>
+            </a:solidFill>
+          </a:ln>
+        </p:spPr>
+        <p:style>
+          <a:lnRef idx="1">
+            <a:schemeClr val="accent1"/>
+          </a:lnRef>
+          <a:fillRef idx="3">
+            <a:schemeClr val="accent1"/>
+          </a:fillRef>
+          <a:effectRef idx="2">
+            <a:schemeClr val="accent1"/>
+          </a:effectRef>
+          <a:fontRef idx="minor">
+            <a:schemeClr val="lt1"/>
+          </a:fontRef>
+        </p:style>
+        <p:txBody>
+          <a:bodyPr rtlCol="0" anchor="ctr"/>
+          <a:lstStyle/>
+          <a:p>
+            <a:endParaRPr/>
+          </a:p>
+        </p:txBody>
+      </p:sp>
+      <p:sp>
+        <p:nvSpPr>
+          <p:cNvPr id="26" name="TextBox 25"/>
+          <p:cNvSpPr txBox="1"/>
+          <p:nvPr/>
+        </p:nvSpPr>
+        <p:spPr>
+          <a:xfrm>
+            <a:off x="8554516" y="2834639"/>
+            <a:ext cx="2814218" cy="457200"/>
+          </a:xfrm>
+          <a:prstGeom prst="rect">
+            <a:avLst/>
+          </a:prstGeom>
+          <a:noFill/>
+        </p:spPr>
+        <p:txBody>
+          <a:bodyPr wrap="square" lIns="45720" tIns="18288" rIns="45720" bIns="18288" anchor="t">
+            <a:spAutoFit/>
+          </a:bodyPr>
+          <a:lstStyle/>
+          <a:p>
+            <a:pPr algn="l"/>
+            <a:r>
+              <a:rPr sz="1300" b="1">
+                <a:solidFill>
+                  <a:srgbClr val="1C75C9"/>
+                </a:solidFill>
+                <a:latin typeface="Noto Sans KR"/>
+              </a:rPr>
+              <a:t>6과정 · LLM 취약점 진단·방어</a:t>
+            </a:r>
+          </a:p>
+        </p:txBody>
+      </p:sp>
+      <p:sp>
+        <p:nvSpPr>
+          <p:cNvPr id="27" name="TextBox 26"/>
+          <p:cNvSpPr txBox="1"/>
+          <p:nvPr/>
+        </p:nvSpPr>
+        <p:spPr>
+          <a:xfrm>
+            <a:off x="8554516" y="3328415"/>
+            <a:ext cx="2814218" cy="557784"/>
+          </a:xfrm>
+          <a:prstGeom prst="rect">
+            <a:avLst/>
+          </a:prstGeom>
+          <a:noFill/>
+        </p:spPr>
+        <p:txBody>
+          <a:bodyPr wrap="square" lIns="45720" tIns="18288" rIns="45720" bIns="18288" anchor="t">
+            <a:spAutoFit/>
+          </a:bodyPr>
+          <a:lstStyle/>
+          <a:p>
+            <a:pPr algn="l"/>
+            <a:r>
+              <a:rPr sz="1100" b="0">
+                <a:solidFill>
+                  <a:srgbClr val="475569"/>
+                </a:solidFill>
+                <a:latin typeface="Noto Sans KR"/>
+              </a:rPr>
+              <a:t>OWASP LLM Top10 레드티밍 · 가드레일</a:t>
+            </a:r>
+          </a:p>
+        </p:txBody>
+      </p:sp>
+      <p:sp>
+        <p:nvSpPr>
+          <p:cNvPr id="28" name="Rounded Rectangle 27"/>
+          <p:cNvSpPr/>
+          <p:nvPr/>
+        </p:nvSpPr>
+        <p:spPr>
+          <a:xfrm>
+            <a:off x="8417356" y="4160520"/>
+            <a:ext cx="3088538" cy="1280160"/>
+          </a:xfrm>
+          <a:prstGeom prst="roundRect">
+            <a:avLst>
+              <a:gd name="adj" fmla="val 5714"/>
+            </a:avLst>
+          </a:prstGeom>
+          <a:solidFill>
+            <a:srgbClr val="FFFFFF"/>
+          </a:solidFill>
+          <a:ln w="12700">
+            <a:solidFill>
+              <a:srgbClr val="E2E8F0"/>
+            </a:solidFill>
+          </a:ln>
+        </p:spPr>
+        <p:style>
+          <a:lnRef idx="1">
+            <a:schemeClr val="accent1"/>
+          </a:lnRef>
+          <a:fillRef idx="3">
+            <a:schemeClr val="accent1"/>
+          </a:fillRef>
+          <a:effectRef idx="2">
+            <a:schemeClr val="accent1"/>
+          </a:effectRef>
+          <a:fontRef idx="minor">
+            <a:schemeClr val="lt1"/>
+          </a:fontRef>
+        </p:style>
+        <p:txBody>
+          <a:bodyPr rtlCol="0" anchor="ctr"/>
+          <a:lstStyle/>
+          <a:p>
+            <a:endParaRPr/>
+          </a:p>
+        </p:txBody>
+      </p:sp>
+      <p:sp>
+        <p:nvSpPr>
+          <p:cNvPr id="29" name="TextBox 28"/>
+          <p:cNvSpPr txBox="1"/>
+          <p:nvPr/>
+        </p:nvSpPr>
+        <p:spPr>
+          <a:xfrm>
+            <a:off x="8554516" y="4297680"/>
+            <a:ext cx="2814218" cy="457200"/>
+          </a:xfrm>
+          <a:prstGeom prst="rect">
+            <a:avLst/>
+          </a:prstGeom>
+          <a:noFill/>
+        </p:spPr>
+        <p:txBody>
+          <a:bodyPr wrap="square" lIns="45720" tIns="18288" rIns="45720" bIns="18288" anchor="t">
+            <a:spAutoFit/>
+          </a:bodyPr>
+          <a:lstStyle/>
+          <a:p>
+            <a:pPr algn="l"/>
+            <a:r>
+              <a:rPr sz="1300" b="1">
+                <a:solidFill>
+                  <a:srgbClr val="1C75C9"/>
+                </a:solidFill>
+                <a:latin typeface="Noto Sans KR"/>
+              </a:rPr>
+              <a:t>7과정 · AI 침해대응 및 복구</a:t>
+            </a:r>
+          </a:p>
+        </p:txBody>
+      </p:sp>
+      <p:sp>
+        <p:nvSpPr>
+          <p:cNvPr id="30" name="TextBox 29"/>
+          <p:cNvSpPr txBox="1"/>
+          <p:nvPr/>
+        </p:nvSpPr>
+        <p:spPr>
+          <a:xfrm>
+            <a:off x="8554516" y="4791456"/>
+            <a:ext cx="2814218" cy="557783"/>
+          </a:xfrm>
+          <a:prstGeom prst="rect">
+            <a:avLst/>
+          </a:prstGeom>
+          <a:noFill/>
+        </p:spPr>
+        <p:txBody>
+          <a:bodyPr wrap="square" lIns="45720" tIns="18288" rIns="45720" bIns="18288" anchor="t">
+            <a:spAutoFit/>
+          </a:bodyPr>
+          <a:lstStyle/>
+          <a:p>
+            <a:pPr algn="l"/>
+            <a:r>
+              <a:rPr sz="1100" b="0">
+                <a:solidFill>
+                  <a:srgbClr val="475569"/>
+                </a:solidFill>
+                <a:latin typeface="Noto Sans KR"/>
+              </a:rPr>
+              <a:t>적대적 침해 탐지 · 모델 포렌식·회복</a:t>
+            </a:r>
+          </a:p>
+        </p:txBody>
+      </p:sp>
+      <p:sp>
+        <p:nvSpPr>
+          <p:cNvPr id="31" name="Right Arrow 30"/>
+          <p:cNvSpPr/>
+          <p:nvPr/>
+        </p:nvSpPr>
+        <p:spPr>
+          <a:xfrm>
+            <a:off x="4039514" y="3703320"/>
+            <a:ext cx="228599" cy="182880"/>
+          </a:xfrm>
+          <a:prstGeom prst="rightArrow">
+            <a:avLst/>
+          </a:prstGeom>
+          <a:solidFill>
+            <a:srgbClr val="94A3B8"/>
+          </a:solidFill>
+          <a:ln>
+            <a:noFill/>
+          </a:ln>
+        </p:spPr>
+        <p:style>
+          <a:lnRef idx="1">
+            <a:schemeClr val="accent1"/>
+          </a:lnRef>
+          <a:fillRef idx="3">
+            <a:schemeClr val="accent1"/>
+          </a:fillRef>
+          <a:effectRef idx="2">
+            <a:schemeClr val="accent1"/>
+          </a:effectRef>
+          <a:fontRef idx="minor">
+            <a:schemeClr val="lt1"/>
+          </a:fontRef>
+        </p:style>
+        <p:txBody>
+          <a:bodyPr rtlCol="0" anchor="ctr"/>
+          <a:lstStyle/>
+          <a:p>
+            <a:endParaRPr/>
+          </a:p>
+        </p:txBody>
+      </p:sp>
+      <p:sp>
+        <p:nvSpPr>
+          <p:cNvPr id="32" name="Right Arrow 31"/>
+          <p:cNvSpPr/>
+          <p:nvPr/>
+        </p:nvSpPr>
+        <p:spPr>
+          <a:xfrm>
+            <a:off x="7905292" y="3703320"/>
+            <a:ext cx="228599" cy="182880"/>
+          </a:xfrm>
+          <a:prstGeom prst="rightArrow">
+            <a:avLst/>
+          </a:prstGeom>
+          <a:solidFill>
+            <a:srgbClr val="94A3B8"/>
+          </a:solidFill>
+          <a:ln>
+            <a:noFill/>
+          </a:ln>
+        </p:spPr>
+        <p:style>
+          <a:lnRef idx="1">
+            <a:schemeClr val="accent1"/>
+          </a:lnRef>
+          <a:fillRef idx="3">
+            <a:schemeClr val="accent1"/>
+          </a:fillRef>
+          <a:effectRef idx="2">
+            <a:schemeClr val="accent1"/>
+          </a:effectRef>
+          <a:fontRef idx="minor">
+            <a:schemeClr val="lt1"/>
+          </a:fontRef>
+        </p:style>
+        <p:txBody>
+          <a:bodyPr rtlCol="0" anchor="ctr"/>
+          <a:lstStyle/>
+          <a:p>
+            <a:endParaRPr/>
+          </a:p>
+        </p:txBody>
+      </p:sp>
+      <p:sp>
+        <p:nvSpPr>
+          <p:cNvPr id="33" name="TextBox 32"/>
+          <p:cNvSpPr txBox="1"/>
+          <p:nvPr/>
+        </p:nvSpPr>
+        <p:spPr>
+          <a:xfrm>
+            <a:off x="11734495" y="6492240"/>
+            <a:ext cx="365760" cy="228600"/>
+          </a:xfrm>
+          <a:prstGeom prst="rect">
+            <a:avLst/>
+          </a:prstGeom>
+          <a:noFill/>
+        </p:spPr>
+        <p:txBody>
+          <a:bodyPr wrap="square" lIns="45720" tIns="18288" rIns="45720" bIns="18288" anchor="t">
+            <a:spAutoFit/>
+          </a:bodyPr>
+          <a:lstStyle/>
+          <a:p>
+            <a:pPr algn="r"/>
+            <a:r>
+              <a:rPr sz="900" b="0">
+                <a:solidFill>
+                  <a:srgbClr val="94A3B8"/>
+                </a:solidFill>
+                <a:latin typeface="Noto Sans KR"/>
+              </a:rPr>
+              <a:t>1</a:t>
+            </a:r>
+          </a:p>
+        </p:txBody>
+      </p:sp>
+      <p:sp>
+        <p:nvSpPr>
+          <p:cNvPr id="34" name="Rounded Rectangle 33"/>
+          <p:cNvSpPr/>
+          <p:nvPr/>
+        </p:nvSpPr>
+        <p:spPr>
+          <a:xfrm>
+            <a:off x="457200" y="5989320"/>
+            <a:ext cx="11277295" cy="457200"/>
+          </a:xfrm>
+          <a:prstGeom prst="roundRect">
+            <a:avLst>
+              <a:gd name="adj" fmla="val 12000"/>
+            </a:avLst>
+          </a:prstGeom>
+          <a:solidFill>
+            <a:srgbClr val="0E5AA8"/>
+          </a:solidFill>
+          <a:ln>
+            <a:noFill/>
+          </a:ln>
+        </p:spPr>
+        <p:style>
+          <a:lnRef idx="1">
+            <a:schemeClr val="accent1"/>
+          </a:lnRef>
+          <a:fillRef idx="3">
+            <a:schemeClr val="accent1"/>
+          </a:fillRef>
+          <a:effectRef idx="2">
+            <a:schemeClr val="accent1"/>
+          </a:effectRef>
+          <a:fontRef idx="minor">
+            <a:schemeClr val="lt1"/>
+          </a:fontRef>
+        </p:style>
+        <p:txBody>
+          <a:bodyPr rtlCol="0" anchor="ctr"/>
+          <a:lstStyle/>
+          <a:p>
+            <a:endParaRPr/>
+          </a:p>
+        </p:txBody>
+      </p:sp>
+      <p:sp>
+        <p:nvSpPr>
+          <p:cNvPr id="35" name="Rectangle 34"/>
+          <p:cNvSpPr/>
+          <p:nvPr/>
+        </p:nvSpPr>
+        <p:spPr>
+          <a:xfrm>
+            <a:off x="457200" y="5989320"/>
+            <a:ext cx="73152" cy="457200"/>
+          </a:xfrm>
+          <a:prstGeom prst="rect">
+            <a:avLst/>
+          </a:prstGeom>
+          <a:solidFill>
+            <a:srgbClr val="1E7ED4"/>
+          </a:solidFill>
+          <a:ln>
+            <a:noFill/>
+          </a:ln>
+        </p:spPr>
+        <p:style>
+          <a:lnRef idx="1">
+            <a:schemeClr val="accent1"/>
+          </a:lnRef>
+          <a:fillRef idx="3">
+            <a:schemeClr val="accent1"/>
+          </a:fillRef>
+          <a:effectRef idx="2">
+            <a:schemeClr val="accent1"/>
+          </a:effectRef>
+          <a:fontRef idx="minor">
+            <a:schemeClr val="lt1"/>
+          </a:fontRef>
+        </p:style>
+        <p:txBody>
+          <a:bodyPr rtlCol="0" anchor="ctr"/>
+          <a:lstStyle/>
+          <a:p>
+            <a:endParaRPr/>
+          </a:p>
+        </p:txBody>
+      </p:sp>
+      <p:sp>
+        <p:nvSpPr>
+          <p:cNvPr id="36" name="TextBox 35"/>
+          <p:cNvSpPr txBox="1"/>
+          <p:nvPr/>
+        </p:nvSpPr>
+        <p:spPr>
+          <a:xfrm>
+            <a:off x="731520" y="5989320"/>
+            <a:ext cx="10728655" cy="457200"/>
+          </a:xfrm>
+          <a:prstGeom prst="rect">
+            <a:avLst/>
+          </a:prstGeom>
+          <a:noFill/>
+        </p:spPr>
+        <p:txBody>
+          <a:bodyPr wrap="square" lIns="45720" tIns="18288" rIns="45720" bIns="18288" anchor="ctr">
+            <a:spAutoFit/>
+          </a:bodyPr>
+          <a:lstStyle/>
+          <a:p>
+            <a:pPr algn="ctr"/>
+            <a:r>
+              <a:rPr sz="1400" b="1">
+                <a:solidFill>
+                  <a:srgbClr val="FFFFFF"/>
+                </a:solidFill>
+                <a:latin typeface="Noto Sans KR"/>
+              </a:rPr>
+              <a:t>단순 AI 사용자가 아닌 「AI를 활용하는 사이버보안 전문 인력」 양성 체계로 전환</a:t>
+            </a:r>
+          </a:p>
+        </p:txBody>
+      </p:sp>
+    </p:spTree>
+  </p:cSld>
+  <p:clrMapOvr>
+    <a:masterClrMapping/>
+  </p:clrMapOvr>
+</p:sld>
+</file>
+
+<file path=ppt/slides/slide5.xml><?xml version="1.0" encoding="utf-8"?>
 <p:sld xmlns:a="http://schemas.openxmlformats.org/drawingml/2006/main" xmlns:r="http://schemas.openxmlformats.org/officeDocument/2006/relationships" xmlns:p="http://schemas.openxmlformats.org/presentationml/2006/main">
   <p:cSld>
     <p:spTree>
